--- a/PyCoach_Assessment_Deck.pptx
+++ b/PyCoach_Assessment_Deck.pptx
@@ -1188,7 +1188,7 @@
                 <a:ea typeface="Arial" pitchFamily="34" charset="-122"/>
                 <a:cs typeface="Arial" pitchFamily="34" charset="-120"/>
               </a:rPr>
-              <a:t>PYCOACH  /  FDE PRACTICAL ASSESSMENT</a:t>
+              <a:t>PYCOACH  /  SHALOM INCHOI</a:t>
             </a:r>
             <a:endParaRPr lang="en-US" sz="650" dirty="0"/>
           </a:p>
@@ -1227,7 +1227,7 @@
                 <a:ea typeface="Arial" pitchFamily="34" charset="-122"/>
                 <a:cs typeface="Arial" pitchFamily="34" charset="-120"/>
               </a:rPr>
-              <a:t>01 JUL 2026</a:t>
+              <a:t>03 JUL 2026</a:t>
             </a:r>
             <a:endParaRPr lang="en-US" sz="650" dirty="0"/>
           </a:p>
@@ -1837,7 +1837,7 @@
         <p:spPr>
           <a:xfrm>
             <a:off x="2907792" y="4617720"/>
-            <a:ext cx="1417320" cy="310896"/>
+            <a:ext cx="1280160" cy="310896"/>
           </a:xfrm>
           <a:prstGeom prst="roundRect">
             <a:avLst>
@@ -1864,7 +1864,7 @@
         <p:spPr>
           <a:xfrm>
             <a:off x="2907792" y="4695444"/>
-            <a:ext cx="1417320" cy="109728"/>
+            <a:ext cx="1280160" cy="109728"/>
           </a:xfrm>
           <a:prstGeom prst="rect">
             <a:avLst/>
@@ -1885,7 +1885,7 @@
                   <a:srgbClr val="17221B"/>
                 </a:solidFill>
               </a:rPr>
-              <a:t>DEPLOYABLE MVP</a:t>
+              <a:t>DEPLOYED MVP</a:t>
             </a:r>
             <a:endParaRPr lang="en-US" sz="750" dirty="0"/>
           </a:p>
@@ -2190,7 +2190,7 @@
         <p:spPr>
           <a:xfrm>
             <a:off x="594360" y="438912"/>
-            <a:ext cx="4114800" cy="182880"/>
+            <a:ext cx="4389120" cy="182880"/>
           </a:xfrm>
           <a:prstGeom prst="rect">
             <a:avLst/>
@@ -2244,14 +2244,14 @@
               <a:buNone/>
             </a:pPr>
             <a:r>
-              <a:rPr lang="en-US" sz="3100" b="1" dirty="0">
+              <a:rPr lang="en-US" sz="3000" b="1" dirty="0">
                 <a:solidFill>
                   <a:srgbClr val="17221B"/>
                 </a:solidFill>
               </a:rPr>
-              <a:t>One loop. Two useful views.</a:t>
-            </a:r>
-            <a:endParaRPr lang="en-US" sz="3100" dirty="0"/>
+              <a:t>One learning loop. Two clear surfaces.</a:t>
+            </a:r>
+            <a:endParaRPr lang="en-US" sz="3000" dirty="0"/>
           </a:p>
         </p:txBody>
       </p:sp>
@@ -2264,7 +2264,7 @@
         <p:spPr>
           <a:xfrm>
             <a:off x="612648" y="1389888"/>
-            <a:ext cx="9875520" cy="347472"/>
+            <a:ext cx="10241280" cy="347472"/>
           </a:xfrm>
           <a:prstGeom prst="rect">
             <a:avLst/>
@@ -2287,7 +2287,7 @@
                   <a:srgbClr val="607067"/>
                 </a:solidFill>
               </a:rPr>
-              <a:t>PyCoach keeps the learner close to the work while giving instructors a clean signal of progress.</a:t>
+              <a:t>Students get immediate coaching and mastery updates; instructors get cohort signal without digging through raw submission noise.</a:t>
             </a:r>
             <a:endParaRPr lang="en-US" sz="1200" dirty="0"/>
           </a:p>
@@ -2386,7 +2386,7 @@
                   <a:srgbClr val="17221B"/>
                 </a:solidFill>
               </a:rPr>
-              <a:t>Attempt</a:t>
+              <a:t>Practice</a:t>
             </a:r>
             <a:endParaRPr lang="en-US" sz="2400" dirty="0"/>
           </a:p>
@@ -2401,7 +2401,7 @@
         <p:spPr>
           <a:xfrm>
             <a:off x="850392" y="3264408"/>
-            <a:ext cx="2880360" cy="502920"/>
+            <a:ext cx="2880360" cy="594360"/>
           </a:xfrm>
           <a:prstGeom prst="rect">
             <a:avLst/>
@@ -2424,7 +2424,7 @@
                   <a:srgbClr val="607067"/>
                 </a:solidFill>
               </a:rPr>
-              <a:t>Open a focused Python exercise and write code in Monaco.</a:t>
+              <a:t>Open a focused Python assignment, write code in Monaco, and grade it in place.</a:t>
             </a:r>
             <a:endParaRPr lang="en-US" sz="1150" dirty="0"/>
           </a:p>
@@ -2523,7 +2523,7 @@
                   <a:srgbClr val="17221B"/>
                 </a:solidFill>
               </a:rPr>
-              <a:t>Learn</a:t>
+              <a:t>Reflect</a:t>
             </a:r>
             <a:endParaRPr lang="en-US" sz="2400" dirty="0"/>
           </a:p>
@@ -2538,7 +2538,7 @@
         <p:spPr>
           <a:xfrm>
             <a:off x="4672584" y="3264408"/>
-            <a:ext cx="2880360" cy="502920"/>
+            <a:ext cx="2880360" cy="594360"/>
           </a:xfrm>
           <a:prstGeom prst="rect">
             <a:avLst/>
@@ -2561,7 +2561,7 @@
                   <a:srgbClr val="607067"/>
                 </a:solidFill>
               </a:rPr>
-              <a:t>Receive immediate grade, test feedback, and a mastery update.</a:t>
+              <a:t>See score, feedback, mistakes, hint, mastery change, and the recommended next step.</a:t>
             </a:r>
             <a:endParaRPr lang="en-US" sz="1150" dirty="0"/>
           </a:p>
@@ -2660,7 +2660,7 @@
                   <a:srgbClr val="17221B"/>
                 </a:solidFill>
               </a:rPr>
-              <a:t>Adjust</a:t>
+              <a:t>Review</a:t>
             </a:r>
             <a:endParaRPr lang="en-US" sz="2400" dirty="0"/>
           </a:p>
@@ -2675,7 +2675,7 @@
         <p:spPr>
           <a:xfrm>
             <a:off x="8494776" y="3264408"/>
-            <a:ext cx="2880360" cy="502920"/>
+            <a:ext cx="2880360" cy="594360"/>
           </a:xfrm>
           <a:prstGeom prst="rect">
             <a:avLst/>
@@ -2698,7 +2698,7 @@
                   <a:srgbClr val="607067"/>
                 </a:solidFill>
               </a:rPr>
-              <a:t>Get the next exercise from the lowest estimated skill mastery.</a:t>
+              <a:t>Instructors see one row per student, then drill into mastery and submission history.</a:t>
             </a:r>
             <a:endParaRPr lang="en-US" sz="1150" dirty="0"/>
           </a:p>
@@ -2761,7 +2761,7 @@
                   <a:srgbClr val="C7F36B"/>
                 </a:solidFill>
               </a:rPr>
-              <a:t>STUDENT</a:t>
+              <a:t>AUTH</a:t>
             </a:r>
             <a:endParaRPr lang="en-US" sz="800" dirty="0"/>
           </a:p>
@@ -2775,8 +2775,46 @@
         </p:nvSpPr>
         <p:spPr>
           <a:xfrm>
-            <a:off x="2057400" y="4663440"/>
-            <a:ext cx="4023360" cy="274320"/>
+            <a:off x="1874520" y="4645152"/>
+            <a:ext cx="4297680" cy="329184"/>
+          </a:xfrm>
+          <a:prstGeom prst="rect">
+            <a:avLst/>
+          </a:prstGeom>
+          <a:noFill/>
+          <a:ln/>
+        </p:spPr>
+        <p:txBody>
+          <a:bodyPr wrap="square" lIns="0" tIns="0" rIns="0" bIns="0" rtlCol="0" anchor="ctr">
+            <a:normAutofit/>
+          </a:bodyPr>
+          <a:lstStyle/>
+          <a:p>
+            <a:pPr indent="0" marL="0">
+              <a:buNone/>
+            </a:pPr>
+            <a:r>
+              <a:rPr lang="en-US" sz="1300" b="1" dirty="0">
+                <a:solidFill>
+                  <a:srgbClr val="FFFFFF"/>
+                </a:solidFill>
+              </a:rPr>
+              <a:t>Email/password login, student self-signup, and clearly labeled demo accounts</a:t>
+            </a:r>
+            <a:endParaRPr lang="en-US" sz="1300" dirty="0"/>
+          </a:p>
+        </p:txBody>
+      </p:sp>
+      <p:sp>
+        <p:nvSpPr>
+          <p:cNvPr id="20" name="Text 18"/>
+          <p:cNvSpPr/>
+          <p:nvPr/>
+        </p:nvSpPr>
+        <p:spPr>
+          <a:xfrm>
+            <a:off x="6446520" y="4709160"/>
+            <a:ext cx="1645920" cy="164592"/>
           </a:xfrm>
           <a:prstGeom prst="rect">
             <a:avLst/>
@@ -2792,84 +2830,50 @@
               <a:buNone/>
             </a:pPr>
             <a:r>
+              <a:rPr lang="en-US" sz="800" b="1" spc="150" kern="0" dirty="0">
+                <a:solidFill>
+                  <a:srgbClr val="EF6A47"/>
+                </a:solidFill>
+              </a:rPr>
+              <a:t>RECOMMENDATION</a:t>
+            </a:r>
+            <a:endParaRPr lang="en-US" sz="800" dirty="0"/>
+          </a:p>
+        </p:txBody>
+      </p:sp>
+      <p:sp>
+        <p:nvSpPr>
+          <p:cNvPr id="21" name="Text 19"/>
+          <p:cNvSpPr/>
+          <p:nvPr/>
+        </p:nvSpPr>
+        <p:spPr>
+          <a:xfrm>
+            <a:off x="7818120" y="4645152"/>
+            <a:ext cx="3291840" cy="347472"/>
+          </a:xfrm>
+          <a:prstGeom prst="rect">
+            <a:avLst/>
+          </a:prstGeom>
+          <a:noFill/>
+          <a:ln/>
+        </p:spPr>
+        <p:txBody>
+          <a:bodyPr wrap="square" lIns="0" tIns="0" rIns="0" bIns="0" rtlCol="0" anchor="ctr">
+            <a:normAutofit/>
+          </a:bodyPr>
+          <a:lstStyle/>
+          <a:p>
+            <a:pPr indent="0" marL="0">
+              <a:buNone/>
+            </a:pPr>
+            <a:r>
               <a:rPr lang="en-US" sz="1300" b="1" dirty="0">
                 <a:solidFill>
                   <a:srgbClr val="FFFFFF"/>
                 </a:solidFill>
               </a:rPr>
-              <a:t>Exercises · editor · feedback · mastery · recommendation</a:t>
-            </a:r>
-            <a:endParaRPr lang="en-US" sz="1300" dirty="0"/>
-          </a:p>
-        </p:txBody>
-      </p:sp>
-      <p:sp>
-        <p:nvSpPr>
-          <p:cNvPr id="20" name="Text 18"/>
-          <p:cNvSpPr/>
-          <p:nvPr/>
-        </p:nvSpPr>
-        <p:spPr>
-          <a:xfrm>
-            <a:off x="6446520" y="4709160"/>
-            <a:ext cx="1188720" cy="164592"/>
-          </a:xfrm>
-          <a:prstGeom prst="rect">
-            <a:avLst/>
-          </a:prstGeom>
-          <a:noFill/>
-          <a:ln/>
-        </p:spPr>
-        <p:txBody>
-          <a:bodyPr wrap="square" lIns="0" tIns="0" rIns="0" bIns="0" rtlCol="0" anchor="ctr"/>
-          <a:lstStyle/>
-          <a:p>
-            <a:pPr indent="0" marL="0">
-              <a:buNone/>
-            </a:pPr>
-            <a:r>
-              <a:rPr lang="en-US" sz="800" b="1" spc="150" kern="0" dirty="0">
-                <a:solidFill>
-                  <a:srgbClr val="EF6A47"/>
-                </a:solidFill>
-              </a:rPr>
-              <a:t>INSTRUCTOR</a:t>
-            </a:r>
-            <a:endParaRPr lang="en-US" sz="800" dirty="0"/>
-          </a:p>
-        </p:txBody>
-      </p:sp>
-      <p:sp>
-        <p:nvSpPr>
-          <p:cNvPr id="21" name="Text 19"/>
-          <p:cNvSpPr/>
-          <p:nvPr/>
-        </p:nvSpPr>
-        <p:spPr>
-          <a:xfrm>
-            <a:off x="7726680" y="4663440"/>
-            <a:ext cx="3474720" cy="274320"/>
-          </a:xfrm>
-          <a:prstGeom prst="rect">
-            <a:avLst/>
-          </a:prstGeom>
-          <a:noFill/>
-          <a:ln/>
-        </p:spPr>
-        <p:txBody>
-          <a:bodyPr wrap="square" lIns="0" tIns="0" rIns="0" bIns="0" rtlCol="0" anchor="ctr"/>
-          <a:lstStyle/>
-          <a:p>
-            <a:pPr indent="0" marL="0">
-              <a:buNone/>
-            </a:pPr>
-            <a:r>
-              <a:rPr lang="en-US" sz="1300" b="1" dirty="0">
-                <a:solidFill>
-                  <a:srgbClr val="FFFFFF"/>
-                </a:solidFill>
-              </a:rPr>
-              <a:t>Student · assignment · grade · submission time</a:t>
+              <a:t>Start here → next unattempted skill → weakest mastery after evidence exists</a:t>
             </a:r>
             <a:endParaRPr lang="en-US" sz="1300" dirty="0"/>
           </a:p>
@@ -2957,7 +2961,7 @@
         <p:spPr>
           <a:xfrm>
             <a:off x="594360" y="438912"/>
-            <a:ext cx="4114800" cy="182880"/>
+            <a:ext cx="4389120" cy="182880"/>
           </a:xfrm>
           <a:prstGeom prst="rect">
             <a:avLst/>
@@ -3011,14 +3015,14 @@
               <a:buNone/>
             </a:pPr>
             <a:r>
-              <a:rPr lang="en-US" sz="3100" b="1" dirty="0">
+              <a:rPr lang="en-US" sz="3000" b="1" dirty="0">
                 <a:solidFill>
                   <a:srgbClr val="17221B"/>
                 </a:solidFill>
               </a:rPr>
-              <a:t>The working learner experience</a:t>
-            </a:r>
-            <a:endParaRPr lang="en-US" sz="3100" dirty="0"/>
+              <a:t>The current product surface</a:t>
+            </a:r>
+            <a:endParaRPr lang="en-US" sz="3000" dirty="0"/>
           </a:p>
         </p:txBody>
       </p:sp>
@@ -3031,7 +3035,7 @@
         <p:spPr>
           <a:xfrm>
             <a:off x="612648" y="1389888"/>
-            <a:ext cx="9875520" cy="347472"/>
+            <a:ext cx="10241280" cy="347472"/>
           </a:xfrm>
           <a:prstGeom prst="rect">
             <a:avLst/>
@@ -3054,15 +3058,123 @@
                   <a:srgbClr val="607067"/>
                 </a:solidFill>
               </a:rPr>
-              <a:t>Verified in a browser at desktop and mobile breakpoints.</a:t>
+              <a:t>Screens below come from the deployed app and reflect the latest login, student, and instructor flows.</a:t>
             </a:r>
             <a:endParaRPr lang="en-US" sz="1200" dirty="0"/>
           </a:p>
         </p:txBody>
+      </p:sp>
+      <p:sp>
+        <p:nvSpPr>
+          <p:cNvPr id="5" name="Shape 3"/>
+          <p:cNvSpPr/>
+          <p:nvPr/>
+        </p:nvSpPr>
+        <p:spPr>
+          <a:xfrm>
+            <a:off x="621792" y="1828800"/>
+            <a:ext cx="5760720" cy="4480560"/>
+          </a:xfrm>
+          <a:prstGeom prst="roundRect">
+            <a:avLst>
+              <a:gd name="adj" fmla="val 2857"/>
+            </a:avLst>
+          </a:prstGeom>
+          <a:solidFill>
+            <a:srgbClr val="FFFFFF"/>
+          </a:solidFill>
+          <a:ln w="12700">
+            <a:solidFill>
+              <a:srgbClr val="DCE5D8"/>
+            </a:solidFill>
+            <a:prstDash val="solid"/>
+          </a:ln>
+        </p:spPr>
+      </p:sp>
+      <p:sp>
+        <p:nvSpPr>
+          <p:cNvPr id="6" name="Shape 4"/>
+          <p:cNvSpPr/>
+          <p:nvPr/>
+        </p:nvSpPr>
+        <p:spPr>
+          <a:xfrm>
+            <a:off x="6629400" y="1828800"/>
+            <a:ext cx="2331720" cy="2761488"/>
+          </a:xfrm>
+          <a:prstGeom prst="roundRect">
+            <a:avLst>
+              <a:gd name="adj" fmla="val 5490"/>
+            </a:avLst>
+          </a:prstGeom>
+          <a:solidFill>
+            <a:srgbClr val="FFFFFF"/>
+          </a:solidFill>
+          <a:ln w="12700">
+            <a:solidFill>
+              <a:srgbClr val="DCE5D8"/>
+            </a:solidFill>
+            <a:prstDash val="solid"/>
+          </a:ln>
+        </p:spPr>
+      </p:sp>
+      <p:sp>
+        <p:nvSpPr>
+          <p:cNvPr id="7" name="Shape 5"/>
+          <p:cNvSpPr/>
+          <p:nvPr/>
+        </p:nvSpPr>
+        <p:spPr>
+          <a:xfrm>
+            <a:off x="9189720" y="1828800"/>
+            <a:ext cx="2240280" cy="1371600"/>
+          </a:xfrm>
+          <a:prstGeom prst="roundRect">
+            <a:avLst>
+              <a:gd name="adj" fmla="val 9333"/>
+            </a:avLst>
+          </a:prstGeom>
+          <a:solidFill>
+            <a:srgbClr val="FFFFFF"/>
+          </a:solidFill>
+          <a:ln w="12700">
+            <a:solidFill>
+              <a:srgbClr val="DCE5D8"/>
+            </a:solidFill>
+            <a:prstDash val="solid"/>
+          </a:ln>
+        </p:spPr>
+      </p:sp>
+      <p:sp>
+        <p:nvSpPr>
+          <p:cNvPr id="8" name="Shape 6"/>
+          <p:cNvSpPr/>
+          <p:nvPr/>
+        </p:nvSpPr>
+        <p:spPr>
+          <a:xfrm>
+            <a:off x="9189720" y="3401568"/>
+            <a:ext cx="2240280" cy="1682496"/>
+          </a:xfrm>
+          <a:prstGeom prst="roundRect">
+            <a:avLst>
+              <a:gd name="adj" fmla="val 7609"/>
+            </a:avLst>
+          </a:prstGeom>
+          <a:solidFill>
+            <a:srgbClr val="FFFFFF"/>
+          </a:solidFill>
+          <a:ln w="12700">
+            <a:solidFill>
+              <a:srgbClr val="DCE5D8"/>
+            </a:solidFill>
+            <a:prstDash val="solid"/>
+          </a:ln>
+        </p:spPr>
       </p:sp>
       <p:pic>
         <p:nvPicPr>
-          <p:cNvPr id="5" name="Image 0" descr="/tmp/pycoach-student.png">    </p:cNvPr>
+          <p:cNvPr id="9" name="Image 0" descr="/Users/boonkerdinchoi/Documents/PyCoach/slides/assets/student-dashboard.png">    </p:cNvPr>
           <p:cNvPicPr>
             <a:picLocks noChangeAspect="1"/>
           </p:cNvPicPr>
@@ -3076,44 +3188,17 @@
         </p:blipFill>
         <p:spPr>
           <a:xfrm>
-            <a:off x="621792" y="1847088"/>
-            <a:ext cx="7040880" cy="3950208"/>
+            <a:off x="749808" y="1947672"/>
+            <a:ext cx="5504688" cy="3950208"/>
           </a:xfrm>
           <a:prstGeom prst="rect">
             <a:avLst/>
           </a:prstGeom>
         </p:spPr>
       </p:pic>
-      <p:sp>
-        <p:nvSpPr>
-          <p:cNvPr id="6" name="Shape 3"/>
-          <p:cNvSpPr/>
-          <p:nvPr/>
-        </p:nvSpPr>
-        <p:spPr>
-          <a:xfrm>
-            <a:off x="8001000" y="1847088"/>
-            <a:ext cx="2029968" cy="3950208"/>
-          </a:xfrm>
-          <a:prstGeom prst="roundRect">
-            <a:avLst>
-              <a:gd name="adj" fmla="val 8108"/>
-            </a:avLst>
-          </a:prstGeom>
-          <a:solidFill>
-            <a:srgbClr val="EAF0E5"/>
-          </a:solidFill>
-          <a:ln w="12700">
-            <a:solidFill>
-              <a:srgbClr val="DCE5D8"/>
-            </a:solidFill>
-            <a:prstDash val="solid"/>
-          </a:ln>
-        </p:spPr>
-      </p:sp>
       <p:pic>
         <p:nvPicPr>
-          <p:cNvPr id="7" name="Image 1" descr="/tmp/pycoach-mobile-fixed.png">    </p:cNvPr>
+          <p:cNvPr id="10" name="Image 1" descr="/Users/boonkerdinchoi/Documents/PyCoach/slides/assets/login-signup.png">    </p:cNvPr>
           <p:cNvPicPr>
             <a:picLocks noChangeAspect="1"/>
           </p:cNvPicPr>
@@ -3127,24 +3212,72 @@
         </p:blipFill>
         <p:spPr>
           <a:xfrm>
-            <a:off x="8165592" y="1847088"/>
-            <a:ext cx="1700784" cy="3685032"/>
+            <a:off x="6793992" y="1938528"/>
+            <a:ext cx="2002536" cy="2404872"/>
           </a:xfrm>
           <a:prstGeom prst="rect">
             <a:avLst/>
           </a:prstGeom>
         </p:spPr>
       </p:pic>
-      <p:sp>
-        <p:nvSpPr>
-          <p:cNvPr id="8" name="Shape 4"/>
-          <p:cNvSpPr/>
-          <p:nvPr/>
-        </p:nvSpPr>
-        <p:spPr>
-          <a:xfrm>
-            <a:off x="822960" y="5266944"/>
-            <a:ext cx="804672" cy="310896"/>
+      <p:pic>
+        <p:nvPicPr>
+          <p:cNvPr id="11" name="Image 2" descr="/Users/boonkerdinchoi/Documents/PyCoach/slides/assets/instructor-dashboard.png">    </p:cNvPr>
+          <p:cNvPicPr>
+            <a:picLocks noChangeAspect="1"/>
+          </p:cNvPicPr>
+          <p:nvPr/>
+        </p:nvPicPr>
+        <p:blipFill>
+          <a:blip r:embed="rId3"/>
+          <a:stretch>
+            <a:fillRect/>
+          </a:stretch>
+        </p:blipFill>
+        <p:spPr>
+          <a:xfrm>
+            <a:off x="9317736" y="1965960"/>
+            <a:ext cx="1993392" cy="1197864"/>
+          </a:xfrm>
+          <a:prstGeom prst="rect">
+            <a:avLst/>
+          </a:prstGeom>
+        </p:spPr>
+      </p:pic>
+      <p:pic>
+        <p:nvPicPr>
+          <p:cNvPr id="12" name="Image 3" descr="/Users/boonkerdinchoi/Documents/PyCoach/slides/assets/student-detail.png">    </p:cNvPr>
+          <p:cNvPicPr>
+            <a:picLocks noChangeAspect="1"/>
+          </p:cNvPicPr>
+          <p:nvPr/>
+        </p:nvPicPr>
+        <p:blipFill>
+          <a:blip r:embed="rId4"/>
+          <a:stretch>
+            <a:fillRect/>
+          </a:stretch>
+        </p:blipFill>
+        <p:spPr>
+          <a:xfrm>
+            <a:off x="9317736" y="3547872"/>
+            <a:ext cx="1993392" cy="1435608"/>
+          </a:xfrm>
+          <a:prstGeom prst="rect">
+            <a:avLst/>
+          </a:prstGeom>
+        </p:spPr>
+      </p:pic>
+      <p:sp>
+        <p:nvSpPr>
+          <p:cNvPr id="13" name="Shape 7"/>
+          <p:cNvSpPr/>
+          <p:nvPr/>
+        </p:nvSpPr>
+        <p:spPr>
+          <a:xfrm>
+            <a:off x="841248" y="5852160"/>
+            <a:ext cx="1444752" cy="310896"/>
           </a:xfrm>
           <a:prstGeom prst="roundRect">
             <a:avLst>
@@ -3164,14 +3297,14 @@
       </p:sp>
       <p:sp>
         <p:nvSpPr>
-          <p:cNvPr id="9" name="Text 5"/>
-          <p:cNvSpPr/>
-          <p:nvPr/>
-        </p:nvSpPr>
-        <p:spPr>
-          <a:xfrm>
-            <a:off x="822960" y="5344668"/>
-            <a:ext cx="804672" cy="109728"/>
+          <p:cNvPr id="14" name="Text 8"/>
+          <p:cNvSpPr/>
+          <p:nvPr/>
+        </p:nvSpPr>
+        <p:spPr>
+          <a:xfrm>
+            <a:off x="841248" y="5929884"/>
+            <a:ext cx="1444752" cy="109728"/>
           </a:xfrm>
           <a:prstGeom prst="rect">
             <a:avLst/>
@@ -3192,7 +3325,7 @@
                   <a:srgbClr val="17221B"/>
                 </a:solidFill>
               </a:rPr>
-              <a:t>DESKTOP</a:t>
+              <a:t>STUDENT DASHBOARD</a:t>
             </a:r>
             <a:endParaRPr lang="en-US" sz="750" dirty="0"/>
           </a:p>
@@ -3200,14 +3333,14 @@
       </p:sp>
       <p:sp>
         <p:nvSpPr>
-          <p:cNvPr id="10" name="Shape 6"/>
-          <p:cNvSpPr/>
-          <p:nvPr/>
-        </p:nvSpPr>
-        <p:spPr>
-          <a:xfrm>
-            <a:off x="8586216" y="5266944"/>
-            <a:ext cx="749808" cy="310896"/>
+          <p:cNvPr id="15" name="Shape 9"/>
+          <p:cNvSpPr/>
+          <p:nvPr/>
+        </p:nvSpPr>
+        <p:spPr>
+          <a:xfrm>
+            <a:off x="7059168" y="4736592"/>
+            <a:ext cx="1170432" cy="310896"/>
           </a:xfrm>
           <a:prstGeom prst="roundRect">
             <a:avLst>
@@ -3227,14 +3360,14 @@
       </p:sp>
       <p:sp>
         <p:nvSpPr>
-          <p:cNvPr id="11" name="Text 7"/>
-          <p:cNvSpPr/>
-          <p:nvPr/>
-        </p:nvSpPr>
-        <p:spPr>
-          <a:xfrm>
-            <a:off x="8586216" y="5344668"/>
-            <a:ext cx="749808" cy="109728"/>
+          <p:cNvPr id="16" name="Text 10"/>
+          <p:cNvSpPr/>
+          <p:nvPr/>
+        </p:nvSpPr>
+        <p:spPr>
+          <a:xfrm>
+            <a:off x="7059168" y="4814316"/>
+            <a:ext cx="1170432" cy="109728"/>
           </a:xfrm>
           <a:prstGeom prst="rect">
             <a:avLst/>
@@ -3255,7 +3388,7 @@
                   <a:srgbClr val="FFFFFF"/>
                 </a:solidFill>
               </a:rPr>
-              <a:t>390 PX</a:t>
+              <a:t>LOGIN + SIGNUP</a:t>
             </a:r>
             <a:endParaRPr lang="en-US" sz="750" dirty="0"/>
           </a:p>
@@ -3263,39 +3396,64 @@
       </p:sp>
       <p:sp>
         <p:nvSpPr>
-          <p:cNvPr id="12" name="Text 8"/>
-          <p:cNvSpPr/>
-          <p:nvPr/>
-        </p:nvSpPr>
-        <p:spPr>
-          <a:xfrm>
-            <a:off x="10287000" y="2880360"/>
-            <a:ext cx="1234440" cy="1325880"/>
-          </a:xfrm>
-          <a:prstGeom prst="rect">
-            <a:avLst/>
-          </a:prstGeom>
-          <a:noFill/>
-          <a:ln/>
-        </p:spPr>
-        <p:txBody>
-          <a:bodyPr wrap="square" lIns="0" tIns="0" rIns="0" bIns="0" rtlCol="0" anchor="ctr">
-            <a:normAutofit/>
-          </a:bodyPr>
-          <a:lstStyle/>
-          <a:p>
-            <a:pPr indent="0" marL="0">
-              <a:buNone/>
-            </a:pPr>
-            <a:r>
-              <a:rPr lang="en-US" sz="1400" b="1" dirty="0">
+          <p:cNvPr id="17" name="Shape 11"/>
+          <p:cNvSpPr/>
+          <p:nvPr/>
+        </p:nvSpPr>
+        <p:spPr>
+          <a:xfrm>
+            <a:off x="9345168" y="5230368"/>
+            <a:ext cx="1325880" cy="310896"/>
+          </a:xfrm>
+          <a:prstGeom prst="roundRect">
+            <a:avLst>
+              <a:gd name="adj" fmla="val 47059"/>
+            </a:avLst>
+          </a:prstGeom>
+          <a:solidFill>
+            <a:srgbClr val="C7F36B"/>
+          </a:solidFill>
+          <a:ln w="12700">
+            <a:solidFill>
+              <a:srgbClr val="C7F36B"/>
+            </a:solidFill>
+            <a:prstDash val="solid"/>
+          </a:ln>
+        </p:spPr>
+      </p:sp>
+      <p:sp>
+        <p:nvSpPr>
+          <p:cNvPr id="18" name="Text 12"/>
+          <p:cNvSpPr/>
+          <p:nvPr/>
+        </p:nvSpPr>
+        <p:spPr>
+          <a:xfrm>
+            <a:off x="9345168" y="5308092"/>
+            <a:ext cx="1325880" cy="109728"/>
+          </a:xfrm>
+          <a:prstGeom prst="rect">
+            <a:avLst/>
+          </a:prstGeom>
+          <a:noFill/>
+          <a:ln/>
+        </p:spPr>
+        <p:txBody>
+          <a:bodyPr wrap="square" lIns="0" tIns="0" rIns="0" bIns="0" rtlCol="0" anchor="ctr"/>
+          <a:lstStyle/>
+          <a:p>
+            <a:pPr algn="ctr" indent="0" marL="0">
+              <a:buNone/>
+            </a:pPr>
+            <a:r>
+              <a:rPr lang="en-US" sz="750" b="1" spc="70" kern="0" dirty="0">
                 <a:solidFill>
                   <a:srgbClr val="17221B"/>
                 </a:solidFill>
               </a:rPr>
-              <a:t>Adaptive recommendation and visible mastery are on the same screen—no analytics scavenger hunt.</a:t>
-            </a:r>
-            <a:endParaRPr lang="en-US" sz="1400" dirty="0"/>
+              <a:t>INSTRUCTOR DETAIL</a:t>
+            </a:r>
+            <a:endParaRPr lang="en-US" sz="750" dirty="0"/>
           </a:p>
         </p:txBody>
       </p:sp>
@@ -3381,7 +3539,7 @@
         <p:spPr>
           <a:xfrm>
             <a:off x="594360" y="438912"/>
-            <a:ext cx="4114800" cy="182880"/>
+            <a:ext cx="4389120" cy="182880"/>
           </a:xfrm>
           <a:prstGeom prst="rect">
             <a:avLst/>
@@ -3435,14 +3593,14 @@
               <a:buNone/>
             </a:pPr>
             <a:r>
-              <a:rPr lang="en-US" sz="3100" b="1" dirty="0">
+              <a:rPr lang="en-US" sz="3000" b="1" dirty="0">
                 <a:solidFill>
                   <a:srgbClr val="17221B"/>
                 </a:solidFill>
               </a:rPr>
-              <a:t>A deliberately small deployment surface</a:t>
-            </a:r>
-            <a:endParaRPr lang="en-US" sz="3100" dirty="0"/>
+              <a:t>A deliberately small MVP surface</a:t>
+            </a:r>
+            <a:endParaRPr lang="en-US" sz="3000" dirty="0"/>
           </a:p>
         </p:txBody>
       </p:sp>
@@ -3455,7 +3613,7 @@
         <p:spPr>
           <a:xfrm>
             <a:off x="612648" y="1389888"/>
-            <a:ext cx="9875520" cy="347472"/>
+            <a:ext cx="10241280" cy="347472"/>
           </a:xfrm>
           <a:prstGeom prst="rect">
             <a:avLst/>
@@ -3478,7 +3636,7 @@
                   <a:srgbClr val="607067"/>
                 </a:solidFill>
               </a:rPr>
-              <a:t>One Next.js repository; clear boundaries around execution and persistence.</a:t>
+              <a:t>One Next.js codebase, Supabase for auth and persistence, and Groq for fast grading feedback.</a:t>
             </a:r>
             <a:endParaRPr lang="en-US" sz="1200" dirty="0"/>
           </a:p>
@@ -3593,7 +3751,7 @@
                   <a:srgbClr val="607067"/>
                 </a:solidFill>
               </a:rPr>
-              <a:t>Monaco Editor</a:t>
+              <a:t>Monaco editor</a:t>
             </a:r>
             <a:endParaRPr lang="en-US" sz="1150" dirty="0"/>
           </a:p>
@@ -3887,29 +4045,6 @@
         </p:nvSpPr>
         <p:spPr>
           <a:xfrm>
-            <a:off x="5650992" y="3657600"/>
-            <a:ext cx="0" cy="621792"/>
-          </a:xfrm>
-          <a:prstGeom prst="line">
-            <a:avLst/>
-          </a:prstGeom>
-          <a:noFill/>
-          <a:ln w="25400">
-            <a:solidFill>
-              <a:srgbClr val="295B3B"/>
-            </a:solidFill>
-            <a:prstDash val="solid"/>
-          </a:ln>
-        </p:spPr>
-      </p:sp>
-      <p:sp>
-        <p:nvSpPr>
-          <p:cNvPr id="17" name="Shape 15"/>
-          <p:cNvSpPr/>
-          <p:nvPr/>
-        </p:nvSpPr>
-        <p:spPr>
-          <a:xfrm>
             <a:off x="4251960" y="4270248"/>
             <a:ext cx="2834640" cy="1143000"/>
           </a:xfrm>
@@ -3931,7 +4066,7 @@
       </p:sp>
       <p:sp>
         <p:nvSpPr>
-          <p:cNvPr id="18" name="Text 16"/>
+          <p:cNvPr id="17" name="Text 15"/>
           <p:cNvSpPr/>
           <p:nvPr/>
         </p:nvSpPr>
@@ -3959,7 +4094,7 @@
                   <a:srgbClr val="FFFFFF"/>
                 </a:solidFill>
               </a:rPr>
-              <a:t>Isolated Python runner</a:t>
+              <a:t>Groq LLM grader</a:t>
             </a:r>
             <a:endParaRPr lang="en-US" sz="1700" dirty="0"/>
           </a:p>
@@ -3967,23 +4102,25 @@
       </p:sp>
       <p:sp>
         <p:nvSpPr>
-          <p:cNvPr id="19" name="Text 17"/>
-          <p:cNvSpPr/>
-          <p:nvPr/>
-        </p:nvSpPr>
-        <p:spPr>
-          <a:xfrm>
-            <a:off x="4526280" y="4910328"/>
-            <a:ext cx="2286000" cy="182880"/>
-          </a:xfrm>
-          <a:prstGeom prst="rect">
-            <a:avLst/>
-          </a:prstGeom>
-          <a:noFill/>
-          <a:ln/>
-        </p:spPr>
-        <p:txBody>
-          <a:bodyPr wrap="square" lIns="0" tIns="0" rIns="0" bIns="0" rtlCol="0" anchor="ctr"/>
+          <p:cNvPr id="18" name="Text 16"/>
+          <p:cNvSpPr/>
+          <p:nvPr/>
+        </p:nvSpPr>
+        <p:spPr>
+          <a:xfrm>
+            <a:off x="4526280" y="4882896"/>
+            <a:ext cx="2286000" cy="228600"/>
+          </a:xfrm>
+          <a:prstGeom prst="rect">
+            <a:avLst/>
+          </a:prstGeom>
+          <a:noFill/>
+          <a:ln/>
+        </p:spPr>
+        <p:txBody>
+          <a:bodyPr wrap="square" lIns="0" tIns="0" rIns="0" bIns="0" rtlCol="0" anchor="ctr">
+            <a:normAutofit/>
+          </a:bodyPr>
           <a:lstStyle/>
           <a:p>
             <a:pPr algn="ctr" indent="0" marL="0">
@@ -3995,7 +4132,7 @@
                   <a:srgbClr val="C8D2CB"/>
                 </a:solidFill>
               </a:rPr>
-              <a:t>E2B / Firecracker-class sandbox</a:t>
+              <a:t>Assignment + tests + rubric + reference solution</a:t>
             </a:r>
             <a:endParaRPr lang="en-US" sz="900" dirty="0"/>
           </a:p>
@@ -4003,14 +4140,14 @@
       </p:sp>
       <p:sp>
         <p:nvSpPr>
-          <p:cNvPr id="20" name="Shape 18"/>
-          <p:cNvSpPr/>
-          <p:nvPr/>
-        </p:nvSpPr>
-        <p:spPr>
-          <a:xfrm>
-            <a:off x="8229600" y="4718304"/>
-            <a:ext cx="2606040" cy="310896"/>
+          <p:cNvPr id="19" name="Shape 17"/>
+          <p:cNvSpPr/>
+          <p:nvPr/>
+        </p:nvSpPr>
+        <p:spPr>
+          <a:xfrm>
+            <a:off x="8065008" y="4407408"/>
+            <a:ext cx="1097280" cy="310896"/>
           </a:xfrm>
           <a:prstGeom prst="roundRect">
             <a:avLst>
@@ -4030,37 +4167,113 @@
       </p:sp>
       <p:sp>
         <p:nvSpPr>
+          <p:cNvPr id="20" name="Text 18"/>
+          <p:cNvSpPr/>
+          <p:nvPr/>
+        </p:nvSpPr>
+        <p:spPr>
+          <a:xfrm>
+            <a:off x="8065008" y="4485132"/>
+            <a:ext cx="1097280" cy="109728"/>
+          </a:xfrm>
+          <a:prstGeom prst="rect">
+            <a:avLst/>
+          </a:prstGeom>
+          <a:noFill/>
+          <a:ln/>
+        </p:spPr>
+        <p:txBody>
+          <a:bodyPr wrap="square" lIns="0" tIns="0" rIns="0" bIns="0" rtlCol="0" anchor="ctr"/>
+          <a:lstStyle/>
+          <a:p>
+            <a:pPr algn="ctr" indent="0" marL="0">
+              <a:buNone/>
+            </a:pPr>
+            <a:r>
+              <a:rPr lang="en-US" sz="750" b="1" spc="70" kern="0" dirty="0">
+                <a:solidFill>
+                  <a:srgbClr val="17221B"/>
+                </a:solidFill>
+              </a:rPr>
+              <a:t>CURRENT MVP</a:t>
+            </a:r>
+            <a:endParaRPr lang="en-US" sz="750" dirty="0"/>
+          </a:p>
+        </p:txBody>
+      </p:sp>
+      <p:sp>
+        <p:nvSpPr>
           <p:cNvPr id="21" name="Text 19"/>
           <p:cNvSpPr/>
           <p:nvPr/>
         </p:nvSpPr>
         <p:spPr>
           <a:xfrm>
-            <a:off x="8229600" y="4796028"/>
-            <a:ext cx="2606040" cy="109728"/>
-          </a:xfrm>
-          <a:prstGeom prst="rect">
-            <a:avLst/>
-          </a:prstGeom>
-          <a:noFill/>
-          <a:ln/>
-        </p:spPr>
-        <p:txBody>
-          <a:bodyPr wrap="square" lIns="0" tIns="0" rIns="0" bIns="0" rtlCol="0" anchor="ctr"/>
-          <a:lstStyle/>
-          <a:p>
-            <a:pPr algn="ctr" indent="0" marL="0">
-              <a:buNone/>
-            </a:pPr>
-            <a:r>
-              <a:rPr lang="en-US" sz="750" b="1" spc="70" kern="0" dirty="0">
-                <a:solidFill>
-                  <a:srgbClr val="17221B"/>
-                </a:solidFill>
-              </a:rPr>
-              <a:t>SAFE FALLBACK WHEN UNCONFIGURED</a:t>
-            </a:r>
-            <a:endParaRPr lang="en-US" sz="750" dirty="0"/>
+            <a:off x="8065008" y="4782312"/>
+            <a:ext cx="3154680" cy="310896"/>
+          </a:xfrm>
+          <a:prstGeom prst="rect">
+            <a:avLst/>
+          </a:prstGeom>
+          <a:noFill/>
+          <a:ln/>
+        </p:spPr>
+        <p:txBody>
+          <a:bodyPr wrap="square" lIns="0" tIns="0" rIns="0" bIns="0" rtlCol="0" anchor="ctr">
+            <a:normAutofit/>
+          </a:bodyPr>
+          <a:lstStyle/>
+          <a:p>
+            <a:pPr indent="0" marL="0">
+              <a:buNone/>
+            </a:pPr>
+            <a:r>
+              <a:rPr lang="en-US" sz="1050" dirty="0">
+                <a:solidFill>
+                  <a:srgbClr val="607067"/>
+                </a:solidFill>
+              </a:rPr>
+              <a:t>• No arbitrary Python runs inside Next.js or the browser</a:t>
+            </a:r>
+            <a:endParaRPr lang="en-US" sz="1050" dirty="0"/>
+          </a:p>
+        </p:txBody>
+      </p:sp>
+      <p:sp>
+        <p:nvSpPr>
+          <p:cNvPr id="22" name="Text 20"/>
+          <p:cNvSpPr/>
+          <p:nvPr/>
+        </p:nvSpPr>
+        <p:spPr>
+          <a:xfrm>
+            <a:off x="8065008" y="5148072"/>
+            <a:ext cx="3154680" cy="310896"/>
+          </a:xfrm>
+          <a:prstGeom prst="rect">
+            <a:avLst/>
+          </a:prstGeom>
+          <a:noFill/>
+          <a:ln/>
+        </p:spPr>
+        <p:txBody>
+          <a:bodyPr wrap="square" lIns="0" tIns="0" rIns="0" bIns="0" rtlCol="0" anchor="ctr">
+            <a:normAutofit/>
+          </a:bodyPr>
+          <a:lstStyle/>
+          <a:p>
+            <a:pPr indent="0" marL="0">
+              <a:buNone/>
+            </a:pPr>
+            <a:r>
+              <a:rPr lang="en-US" sz="1050" dirty="0">
+                <a:solidFill>
+                  <a:srgbClr val="607067"/>
+                </a:solidFill>
+              </a:rPr>
+              <a:t>• Grading uses prompt-based evaluation with strict JSON output checks</a:t>
+            </a:r>
+            <a:endParaRPr lang="en-US" sz="1050" dirty="0"/>
           </a:p>
         </p:txBody>
       </p:sp>
@@ -4146,7 +4359,7 @@
         <p:spPr>
           <a:xfrm>
             <a:off x="594360" y="438912"/>
-            <a:ext cx="4114800" cy="182880"/>
+            <a:ext cx="4389120" cy="182880"/>
           </a:xfrm>
           <a:prstGeom prst="rect">
             <a:avLst/>
@@ -4200,14 +4413,14 @@
               <a:buNone/>
             </a:pPr>
             <a:r>
-              <a:rPr lang="en-US" sz="3100" b="1" dirty="0">
+              <a:rPr lang="en-US" sz="3000" b="1" dirty="0">
                 <a:solidFill>
                   <a:srgbClr val="17221B"/>
                 </a:solidFill>
               </a:rPr>
-              <a:t>Fast feedback without pretending code is safe</a:t>
-            </a:r>
-            <a:endParaRPr lang="en-US" sz="3100" dirty="0"/>
+              <a:t>Prompted for correctness, completeness, and useful feedback</a:t>
+            </a:r>
+            <a:endParaRPr lang="en-US" sz="3000" dirty="0"/>
           </a:p>
         </p:txBody>
       </p:sp>
@@ -4220,7 +4433,7 @@
         <p:spPr>
           <a:xfrm>
             <a:off x="612648" y="1389888"/>
-            <a:ext cx="9875520" cy="347472"/>
+            <a:ext cx="10241280" cy="347472"/>
           </a:xfrm>
           <a:prstGeom prst="rect">
             <a:avLst/>
@@ -4243,7 +4456,7 @@
                   <a:srgbClr val="607067"/>
                 </a:solidFill>
               </a:rPr>
-              <a:t>The deployed app never executes arbitrary Python inside the Next.js process.</a:t>
+              <a:t>Current MVP uses Groq with richer grading context; deterministic execution is the production upgrade.</a:t>
             </a:r>
             <a:endParaRPr lang="en-US" sz="1200" dirty="0"/>
           </a:p>
@@ -4251,7 +4464,7 @@
       </p:sp>
       <p:pic>
         <p:nvPicPr>
-          <p:cNvPr id="5" name="Image 0" descr="/tmp/pycoach-graded.png">    </p:cNvPr>
+          <p:cNvPr id="5" name="Image 0" descr="/Users/boonkerdinchoi/Documents/PyCoach/slides/assets/assignment-workspace.png">    </p:cNvPr>
           <p:cNvPicPr>
             <a:picLocks noChangeAspect="1"/>
           </p:cNvPicPr>
@@ -4266,7 +4479,7 @@
         <p:spPr>
           <a:xfrm>
             <a:off x="621792" y="1828800"/>
-            <a:ext cx="6812280" cy="3831336"/>
+            <a:ext cx="6675120" cy="3520440"/>
           </a:xfrm>
           <a:prstGeom prst="rect">
             <a:avLst/>
@@ -4275,77 +4488,14 @@
       </p:pic>
       <p:sp>
         <p:nvSpPr>
-          <p:cNvPr id="6" name="Shape 3"/>
-          <p:cNvSpPr/>
-          <p:nvPr/>
-        </p:nvSpPr>
-        <p:spPr>
-          <a:xfrm>
-            <a:off x="7818120" y="1874520"/>
-            <a:ext cx="1234440" cy="310896"/>
-          </a:xfrm>
-          <a:prstGeom prst="roundRect">
-            <a:avLst>
-              <a:gd name="adj" fmla="val 47059"/>
-            </a:avLst>
-          </a:prstGeom>
-          <a:solidFill>
-            <a:srgbClr val="C7F36B"/>
-          </a:solidFill>
-          <a:ln w="12700">
-            <a:solidFill>
-              <a:srgbClr val="C7F36B"/>
-            </a:solidFill>
-            <a:prstDash val="solid"/>
-          </a:ln>
-        </p:spPr>
-      </p:sp>
-      <p:sp>
-        <p:nvSpPr>
-          <p:cNvPr id="7" name="Text 4"/>
-          <p:cNvSpPr/>
-          <p:nvPr/>
-        </p:nvSpPr>
-        <p:spPr>
-          <a:xfrm>
-            <a:off x="7818120" y="1952244"/>
-            <a:ext cx="1234440" cy="109728"/>
-          </a:xfrm>
-          <a:prstGeom prst="rect">
-            <a:avLst/>
-          </a:prstGeom>
-          <a:noFill/>
-          <a:ln/>
-        </p:spPr>
-        <p:txBody>
-          <a:bodyPr wrap="square" lIns="0" tIns="0" rIns="0" bIns="0" rtlCol="0" anchor="ctr"/>
-          <a:lstStyle/>
-          <a:p>
-            <a:pPr algn="ctr" indent="0" marL="0">
-              <a:buNone/>
-            </a:pPr>
-            <a:r>
-              <a:rPr lang="en-US" sz="750" b="1" spc="70" kern="0" dirty="0">
-                <a:solidFill>
-                  <a:srgbClr val="17221B"/>
-                </a:solidFill>
-              </a:rPr>
-              <a:t>LOCAL / DEMO</a:t>
-            </a:r>
-            <a:endParaRPr lang="en-US" sz="750" dirty="0"/>
-          </a:p>
-        </p:txBody>
-      </p:sp>
-      <p:sp>
-        <p:nvSpPr>
-          <p:cNvPr id="8" name="Text 5"/>
-          <p:cNvSpPr/>
-          <p:nvPr/>
-        </p:nvSpPr>
-        <p:spPr>
-          <a:xfrm>
-            <a:off x="7818120" y="2295144"/>
-            <a:ext cx="3474720" cy="566928"/>
+          <p:cNvPr id="6" name="Text 3"/>
+          <p:cNvSpPr/>
+          <p:nvPr/>
+        </p:nvSpPr>
+        <p:spPr>
+          <a:xfrm>
+            <a:off x="7635240" y="2148840"/>
+            <a:ext cx="3657600" cy="310896"/>
           </a:xfrm>
           <a:prstGeom prst="rect">
             <a:avLst/>
@@ -4368,7 +4518,7 @@
                   <a:srgbClr val="607067"/>
                 </a:solidFill>
               </a:rPr>
-              <a:t>Structural fallback gives immediate, clearly labelled formative feedback.</a:t>
+              <a:t>• Prompt includes title, description, skill, starter code, public tests, hidden tests, rubric, and backend-only reference solution</a:t>
             </a:r>
             <a:endParaRPr lang="en-US" sz="1150" dirty="0"/>
           </a:p>
@@ -4376,77 +4526,14 @@
       </p:sp>
       <p:sp>
         <p:nvSpPr>
-          <p:cNvPr id="9" name="Shape 6"/>
-          <p:cNvSpPr/>
-          <p:nvPr/>
-        </p:nvSpPr>
-        <p:spPr>
-          <a:xfrm>
-            <a:off x="7818120" y="3099816"/>
-            <a:ext cx="1234440" cy="310896"/>
-          </a:xfrm>
-          <a:prstGeom prst="roundRect">
-            <a:avLst>
-              <a:gd name="adj" fmla="val 47059"/>
-            </a:avLst>
-          </a:prstGeom>
-          <a:solidFill>
-            <a:srgbClr val="C7F36B"/>
-          </a:solidFill>
-          <a:ln w="12700">
-            <a:solidFill>
-              <a:srgbClr val="C7F36B"/>
-            </a:solidFill>
-            <a:prstDash val="solid"/>
-          </a:ln>
-        </p:spPr>
-      </p:sp>
-      <p:sp>
-        <p:nvSpPr>
-          <p:cNvPr id="10" name="Text 7"/>
-          <p:cNvSpPr/>
-          <p:nvPr/>
-        </p:nvSpPr>
-        <p:spPr>
-          <a:xfrm>
-            <a:off x="7818120" y="3177540"/>
-            <a:ext cx="1234440" cy="109728"/>
-          </a:xfrm>
-          <a:prstGeom prst="rect">
-            <a:avLst/>
-          </a:prstGeom>
-          <a:noFill/>
-          <a:ln/>
-        </p:spPr>
-        <p:txBody>
-          <a:bodyPr wrap="square" lIns="0" tIns="0" rIns="0" bIns="0" rtlCol="0" anchor="ctr"/>
-          <a:lstStyle/>
-          <a:p>
-            <a:pPr algn="ctr" indent="0" marL="0">
-              <a:buNone/>
-            </a:pPr>
-            <a:r>
-              <a:rPr lang="en-US" sz="750" b="1" spc="70" kern="0" dirty="0">
-                <a:solidFill>
-                  <a:srgbClr val="17221B"/>
-                </a:solidFill>
-              </a:rPr>
-              <a:t>DEPLOYED</a:t>
-            </a:r>
-            <a:endParaRPr lang="en-US" sz="750" dirty="0"/>
-          </a:p>
-        </p:txBody>
-      </p:sp>
-      <p:sp>
-        <p:nvSpPr>
-          <p:cNvPr id="11" name="Text 8"/>
-          <p:cNvSpPr/>
-          <p:nvPr/>
-        </p:nvSpPr>
-        <p:spPr>
-          <a:xfrm>
-            <a:off x="7818120" y="3520440"/>
-            <a:ext cx="3474720" cy="566928"/>
+          <p:cNvPr id="7" name="Text 4"/>
+          <p:cNvSpPr/>
+          <p:nvPr/>
+        </p:nvSpPr>
+        <p:spPr>
+          <a:xfrm>
+            <a:off x="7635240" y="2743200"/>
+            <a:ext cx="3657600" cy="310896"/>
           </a:xfrm>
           <a:prstGeom prst="rect">
             <a:avLst/>
@@ -4469,7 +4556,7 @@
                   <a:srgbClr val="607067"/>
                 </a:solidFill>
               </a:rPr>
-              <a:t>CODE_RUNNER_URL sends code + hidden tests to an isolated worker with timeout.</a:t>
+              <a:t>• The grader is asked to check every required branch or case, not just the easiest visible example</a:t>
             </a:r>
             <a:endParaRPr lang="en-US" sz="1150" dirty="0"/>
           </a:p>
@@ -4477,14 +4564,90 @@
       </p:sp>
       <p:sp>
         <p:nvSpPr>
-          <p:cNvPr id="12" name="Shape 9"/>
-          <p:cNvSpPr/>
-          <p:nvPr/>
-        </p:nvSpPr>
-        <p:spPr>
-          <a:xfrm>
-            <a:off x="7818120" y="4325112"/>
-            <a:ext cx="1234440" cy="310896"/>
+          <p:cNvPr id="8" name="Text 5"/>
+          <p:cNvSpPr/>
+          <p:nvPr/>
+        </p:nvSpPr>
+        <p:spPr>
+          <a:xfrm>
+            <a:off x="7635240" y="3337560"/>
+            <a:ext cx="3657600" cy="310896"/>
+          </a:xfrm>
+          <a:prstGeom prst="rect">
+            <a:avLst/>
+          </a:prstGeom>
+          <a:noFill/>
+          <a:ln/>
+        </p:spPr>
+        <p:txBody>
+          <a:bodyPr wrap="square" lIns="0" tIns="0" rIns="0" bIns="0" rtlCol="0" anchor="ctr">
+            <a:normAutofit/>
+          </a:bodyPr>
+          <a:lstStyle/>
+          <a:p>
+            <a:pPr indent="0" marL="0">
+              <a:buNone/>
+            </a:pPr>
+            <a:r>
+              <a:rPr lang="en-US" sz="1150" dirty="0">
+                <a:solidFill>
+                  <a:srgbClr val="607067"/>
+                </a:solidFill>
+              </a:rPr>
+              <a:t>• If syntax issues and missing logic both exist, feedback should mention both</a:t>
+            </a:r>
+            <a:endParaRPr lang="en-US" sz="1150" dirty="0"/>
+          </a:p>
+        </p:txBody>
+      </p:sp>
+      <p:sp>
+        <p:nvSpPr>
+          <p:cNvPr id="9" name="Text 6"/>
+          <p:cNvSpPr/>
+          <p:nvPr/>
+        </p:nvSpPr>
+        <p:spPr>
+          <a:xfrm>
+            <a:off x="7635240" y="3931920"/>
+            <a:ext cx="3657600" cy="310896"/>
+          </a:xfrm>
+          <a:prstGeom prst="rect">
+            <a:avLst/>
+          </a:prstGeom>
+          <a:noFill/>
+          <a:ln/>
+        </p:spPr>
+        <p:txBody>
+          <a:bodyPr wrap="square" lIns="0" tIns="0" rIns="0" bIns="0" rtlCol="0" anchor="ctr">
+            <a:normAutofit/>
+          </a:bodyPr>
+          <a:lstStyle/>
+          <a:p>
+            <a:pPr indent="0" marL="0">
+              <a:buNone/>
+            </a:pPr>
+            <a:r>
+              <a:rPr lang="en-US" sz="1150" dirty="0">
+                <a:solidFill>
+                  <a:srgbClr val="607067"/>
+                </a:solidFill>
+              </a:rPr>
+              <a:t>• Output must be valid JSON before any grade is saved</a:t>
+            </a:r>
+            <a:endParaRPr lang="en-US" sz="1150" dirty="0"/>
+          </a:p>
+        </p:txBody>
+      </p:sp>
+      <p:sp>
+        <p:nvSpPr>
+          <p:cNvPr id="10" name="Shape 7"/>
+          <p:cNvSpPr/>
+          <p:nvPr/>
+        </p:nvSpPr>
+        <p:spPr>
+          <a:xfrm>
+            <a:off x="7818120" y="5102352"/>
+            <a:ext cx="1645920" cy="310896"/>
           </a:xfrm>
           <a:prstGeom prst="roundRect">
             <a:avLst>
@@ -4504,14 +4667,14 @@
       </p:sp>
       <p:sp>
         <p:nvSpPr>
-          <p:cNvPr id="13" name="Text 10"/>
-          <p:cNvSpPr/>
-          <p:nvPr/>
-        </p:nvSpPr>
-        <p:spPr>
-          <a:xfrm>
-            <a:off x="7818120" y="4402836"/>
-            <a:ext cx="1234440" cy="109728"/>
+          <p:cNvPr id="11" name="Text 8"/>
+          <p:cNvSpPr/>
+          <p:nvPr/>
+        </p:nvSpPr>
+        <p:spPr>
+          <a:xfrm>
+            <a:off x="7818120" y="5180076"/>
+            <a:ext cx="1645920" cy="109728"/>
           </a:xfrm>
           <a:prstGeom prst="rect">
             <a:avLst/>
@@ -4532,7 +4695,7 @@
                   <a:srgbClr val="FFFFFF"/>
                 </a:solidFill>
               </a:rPr>
-              <a:t>PRODUCTION</a:t>
+              <a:t>PRODUCTION UPGRADE</a:t>
             </a:r>
             <a:endParaRPr lang="en-US" sz="750" dirty="0"/>
           </a:p>
@@ -4540,14 +4703,14 @@
       </p:sp>
       <p:sp>
         <p:nvSpPr>
-          <p:cNvPr id="14" name="Text 11"/>
-          <p:cNvSpPr/>
-          <p:nvPr/>
-        </p:nvSpPr>
-        <p:spPr>
-          <a:xfrm>
-            <a:off x="7818120" y="4745736"/>
-            <a:ext cx="3474720" cy="566928"/>
+          <p:cNvPr id="12" name="Text 9"/>
+          <p:cNvSpPr/>
+          <p:nvPr/>
+        </p:nvSpPr>
+        <p:spPr>
+          <a:xfrm>
+            <a:off x="9646920" y="5120640"/>
+            <a:ext cx="1828800" cy="457200"/>
           </a:xfrm>
           <a:prstGeom prst="rect">
             <a:avLst/>
@@ -4565,14 +4728,14 @@
               <a:buNone/>
             </a:pPr>
             <a:r>
-              <a:rPr lang="en-US" sz="1150" b="1" dirty="0">
-                <a:solidFill>
-                  <a:srgbClr val="607067"/>
-                </a:solidFill>
-              </a:rPr>
-              <a:t>Ephemeral network-disabled sandbox; CPU, memory, process and output limits.</a:t>
-            </a:r>
-            <a:endParaRPr lang="en-US" sz="1150" dirty="0"/>
+              <a:rPr lang="en-US" sz="1050" b="1" dirty="0">
+                <a:solidFill>
+                  <a:srgbClr val="17221B"/>
+                </a:solidFill>
+              </a:rPr>
+              <a:t>Deterministic sandbox execution plus LLM explanation remains future work, not a current claim.</a:t>
+            </a:r>
+            <a:endParaRPr lang="en-US" sz="1050" dirty="0"/>
           </a:p>
         </p:txBody>
       </p:sp>
@@ -4658,7 +4821,7 @@
         <p:spPr>
           <a:xfrm>
             <a:off x="594360" y="438912"/>
-            <a:ext cx="4114800" cy="182880"/>
+            <a:ext cx="4389120" cy="182880"/>
           </a:xfrm>
           <a:prstGeom prst="rect">
             <a:avLst/>
@@ -4712,14 +4875,14 @@
               <a:buNone/>
             </a:pPr>
             <a:r>
-              <a:rPr lang="en-US" sz="3100" b="1" dirty="0">
+              <a:rPr lang="en-US" sz="3000" b="1" dirty="0">
                 <a:solidFill>
                   <a:srgbClr val="17221B"/>
                 </a:solidFill>
               </a:rPr>
-              <a:t>An interpretable model for sparse data</a:t>
-            </a:r>
-            <a:endParaRPr lang="en-US" sz="3100" dirty="0"/>
+              <a:t>BKT is simple, interpretable, and honest about sparse data</a:t>
+            </a:r>
+            <a:endParaRPr lang="en-US" sz="3000" dirty="0"/>
           </a:p>
         </p:txBody>
       </p:sp>
@@ -4732,7 +4895,7 @@
         <p:spPr>
           <a:xfrm>
             <a:off x="612648" y="1389888"/>
-            <a:ext cx="9875520" cy="347472"/>
+            <a:ext cx="10241280" cy="347472"/>
           </a:xfrm>
           <a:prstGeom prst="rect">
             <a:avLst/>
@@ -4755,7 +4918,7 @@
                   <a:srgbClr val="607067"/>
                 </a:solidFill>
               </a:rPr>
-              <a:t>Bayesian Knowledge Tracing updates one latent mastery probability per learner and skill.</a:t>
+              <a:t>The UI hides the 0.30 prior until a skill has evidence, then recommends what to do next based on observed work.</a:t>
             </a:r>
             <a:endParaRPr lang="en-US" sz="1200" dirty="0"/>
           </a:p>
@@ -4769,205 +4932,12 @@
         </p:nvSpPr>
         <p:spPr>
           <a:xfrm>
-            <a:off x="621792" y="1901952"/>
-            <a:ext cx="4572000" cy="3383280"/>
+            <a:off x="621792" y="1828800"/>
+            <a:ext cx="3474720" cy="3154680"/>
           </a:xfrm>
           <a:prstGeom prst="roundRect">
             <a:avLst>
-              <a:gd name="adj" fmla="val 4865"/>
-            </a:avLst>
-          </a:prstGeom>
-          <a:solidFill>
-            <a:srgbClr val="17221B"/>
-          </a:solidFill>
-          <a:ln w="12700">
-            <a:solidFill>
-              <a:srgbClr val="17221B"/>
-            </a:solidFill>
-            <a:prstDash val="solid"/>
-          </a:ln>
-        </p:spPr>
-      </p:sp>
-      <p:sp>
-        <p:nvSpPr>
-          <p:cNvPr id="6" name="Text 4"/>
-          <p:cNvSpPr/>
-          <p:nvPr/>
-        </p:nvSpPr>
-        <p:spPr>
-          <a:xfrm>
-            <a:off x="960120" y="2267712"/>
-            <a:ext cx="1005840" cy="164592"/>
-          </a:xfrm>
-          <a:prstGeom prst="rect">
-            <a:avLst/>
-          </a:prstGeom>
-          <a:noFill/>
-          <a:ln/>
-        </p:spPr>
-        <p:txBody>
-          <a:bodyPr wrap="square" lIns="0" tIns="0" rIns="0" bIns="0" rtlCol="0" anchor="ctr"/>
-          <a:lstStyle/>
-          <a:p>
-            <a:pPr indent="0" marL="0">
-              <a:buNone/>
-            </a:pPr>
-            <a:r>
-              <a:rPr lang="en-US" sz="800" b="1" spc="180" kern="0" dirty="0">
-                <a:solidFill>
-                  <a:srgbClr val="C7F36B"/>
-                </a:solidFill>
-              </a:rPr>
-              <a:t>OBSERVE</a:t>
-            </a:r>
-            <a:endParaRPr lang="en-US" sz="800" dirty="0"/>
-          </a:p>
-        </p:txBody>
-      </p:sp>
-      <p:sp>
-        <p:nvSpPr>
-          <p:cNvPr id="7" name="Text 5"/>
-          <p:cNvSpPr/>
-          <p:nvPr/>
-        </p:nvSpPr>
-        <p:spPr>
-          <a:xfrm>
-            <a:off x="960120" y="2651760"/>
-            <a:ext cx="3566160" cy="320040"/>
-          </a:xfrm>
-          <a:prstGeom prst="rect">
-            <a:avLst/>
-          </a:prstGeom>
-          <a:noFill/>
-          <a:ln/>
-        </p:spPr>
-        <p:txBody>
-          <a:bodyPr wrap="square" lIns="0" tIns="0" rIns="0" bIns="0" rtlCol="0" anchor="ctr"/>
-          <a:lstStyle/>
-          <a:p>
-            <a:pPr indent="0" marL="0">
-              <a:buNone/>
-            </a:pPr>
-            <a:r>
-              <a:rPr lang="en-US" sz="2500" b="1" dirty="0">
-                <a:solidFill>
-                  <a:srgbClr val="FFFFFF"/>
-                </a:solidFill>
-              </a:rPr>
-              <a:t>correct / incorrect</a:t>
-            </a:r>
-            <a:endParaRPr lang="en-US" sz="2500" dirty="0"/>
-          </a:p>
-        </p:txBody>
-      </p:sp>
-      <p:sp>
-        <p:nvSpPr>
-          <p:cNvPr id="8" name="Text 6"/>
-          <p:cNvSpPr/>
-          <p:nvPr/>
-        </p:nvSpPr>
-        <p:spPr>
-          <a:xfrm>
-            <a:off x="960120" y="3273552"/>
-            <a:ext cx="3566160" cy="1325880"/>
-          </a:xfrm>
-          <a:prstGeom prst="rect">
-            <a:avLst/>
-          </a:prstGeom>
-          <a:noFill/>
-          <a:ln/>
-        </p:spPr>
-        <p:txBody>
-          <a:bodyPr wrap="square" lIns="0" tIns="0" rIns="0" bIns="0" rtlCol="0" anchor="ctr">
-            <a:normAutofit/>
-          </a:bodyPr>
-          <a:lstStyle/>
-          <a:p>
-            <a:pPr algn="ctr" indent="0" marL="0">
-              <a:buNone/>
-            </a:pPr>
-            <a:r>
-              <a:rPr lang="en-US" sz="1600" b="1" dirty="0">
-                <a:solidFill>
-                  <a:srgbClr val="D8E1DA"/>
-                </a:solidFill>
-              </a:rPr>
-              <a:t>Bayes update with slip + guess</a:t>
-            </a:r>
-            <a:endParaRPr lang="en-US" sz="1600" dirty="0"/>
-          </a:p>
-          <a:p>
-            <a:pPr algn="ctr" indent="0" marL="0">
-              <a:buNone/>
-            </a:pPr>
-            <a:r>
-              <a:rPr lang="en-US" sz="1600" b="1" dirty="0">
-                <a:solidFill>
-                  <a:srgbClr val="D8E1DA"/>
-                </a:solidFill>
-              </a:rPr>
-              <a:t>↓</a:t>
-            </a:r>
-            <a:endParaRPr lang="en-US" sz="1600" dirty="0"/>
-          </a:p>
-          <a:p>
-            <a:pPr algn="ctr" indent="0" marL="0">
-              <a:buNone/>
-            </a:pPr>
-            <a:r>
-              <a:rPr lang="en-US" sz="1600" b="1" dirty="0">
-                <a:solidFill>
-                  <a:srgbClr val="D8E1DA"/>
-                </a:solidFill>
-              </a:rPr>
-              <a:t>learning transition</a:t>
-            </a:r>
-            <a:endParaRPr lang="en-US" sz="1600" dirty="0"/>
-          </a:p>
-          <a:p>
-            <a:pPr algn="ctr" indent="0" marL="0">
-              <a:buNone/>
-            </a:pPr>
-            <a:r>
-              <a:rPr lang="en-US" sz="1600" b="1" dirty="0">
-                <a:solidFill>
-                  <a:srgbClr val="D8E1DA"/>
-                </a:solidFill>
-              </a:rPr>
-              <a:t>↓</a:t>
-            </a:r>
-            <a:endParaRPr lang="en-US" sz="1600" dirty="0"/>
-          </a:p>
-          <a:p>
-            <a:pPr algn="ctr" indent="0" marL="0">
-              <a:buNone/>
-            </a:pPr>
-            <a:r>
-              <a:rPr lang="en-US" sz="1600" b="1" dirty="0">
-                <a:solidFill>
-                  <a:srgbClr val="D8E1DA"/>
-                </a:solidFill>
-              </a:rPr>
-              <a:t>new P(mastery)</a:t>
-            </a:r>
-            <a:endParaRPr lang="en-US" sz="1600" dirty="0"/>
-          </a:p>
-        </p:txBody>
-      </p:sp>
-      <p:sp>
-        <p:nvSpPr>
-          <p:cNvPr id="9" name="Shape 7"/>
-          <p:cNvSpPr/>
-          <p:nvPr/>
-        </p:nvSpPr>
-        <p:spPr>
-          <a:xfrm>
-            <a:off x="5623560" y="1965960"/>
-            <a:ext cx="2240280" cy="822960"/>
-          </a:xfrm>
-          <a:prstGeom prst="roundRect">
-            <a:avLst>
-              <a:gd name="adj" fmla="val 15556"/>
+              <a:gd name="adj" fmla="val 4058"/>
             </a:avLst>
           </a:prstGeom>
           <a:solidFill>
@@ -4983,90 +4953,18 @@
       </p:sp>
       <p:sp>
         <p:nvSpPr>
-          <p:cNvPr id="10" name="Text 8"/>
-          <p:cNvSpPr/>
-          <p:nvPr/>
-        </p:nvSpPr>
-        <p:spPr>
-          <a:xfrm>
-            <a:off x="5806440" y="2148840"/>
-            <a:ext cx="731520" cy="182880"/>
-          </a:xfrm>
-          <a:prstGeom prst="rect">
-            <a:avLst/>
-          </a:prstGeom>
-          <a:noFill/>
-          <a:ln/>
-        </p:spPr>
-        <p:txBody>
-          <a:bodyPr wrap="square" lIns="0" tIns="0" rIns="0" bIns="0" rtlCol="0" anchor="ctr"/>
-          <a:lstStyle/>
-          <a:p>
-            <a:pPr indent="0" marL="0">
-              <a:buNone/>
-            </a:pPr>
-            <a:r>
-              <a:rPr lang="en-US" sz="1000" b="1" dirty="0">
-                <a:solidFill>
-                  <a:srgbClr val="295B3B"/>
-                </a:solidFill>
-              </a:rPr>
-              <a:t>P(L₀)</a:t>
-            </a:r>
-            <a:endParaRPr lang="en-US" sz="1000" dirty="0"/>
-          </a:p>
-        </p:txBody>
-      </p:sp>
-      <p:sp>
-        <p:nvSpPr>
-          <p:cNvPr id="11" name="Text 9"/>
-          <p:cNvSpPr/>
-          <p:nvPr/>
-        </p:nvSpPr>
-        <p:spPr>
-          <a:xfrm>
-            <a:off x="6766560" y="2075688"/>
-            <a:ext cx="822960" cy="320040"/>
-          </a:xfrm>
-          <a:prstGeom prst="rect">
-            <a:avLst/>
-          </a:prstGeom>
-          <a:noFill/>
-          <a:ln/>
-        </p:spPr>
-        <p:txBody>
-          <a:bodyPr wrap="square" lIns="0" tIns="0" rIns="0" bIns="0" rtlCol="0" anchor="ctr"/>
-          <a:lstStyle/>
-          <a:p>
-            <a:pPr algn="r" indent="0" marL="0">
-              <a:buNone/>
-            </a:pPr>
-            <a:r>
-              <a:rPr lang="en-US" sz="2200" b="1" dirty="0">
-                <a:solidFill>
-                  <a:srgbClr val="17221B"/>
-                </a:solidFill>
-              </a:rPr>
-              <a:t>0.30</a:t>
-            </a:r>
-            <a:endParaRPr lang="en-US" sz="2200" dirty="0"/>
-          </a:p>
-        </p:txBody>
-      </p:sp>
-      <p:sp>
-        <p:nvSpPr>
-          <p:cNvPr id="12" name="Shape 10"/>
-          <p:cNvSpPr/>
-          <p:nvPr/>
-        </p:nvSpPr>
-        <p:spPr>
-          <a:xfrm>
-            <a:off x="8183880" y="1965960"/>
-            <a:ext cx="2240280" cy="822960"/>
+          <p:cNvPr id="6" name="Shape 4"/>
+          <p:cNvSpPr/>
+          <p:nvPr/>
+        </p:nvSpPr>
+        <p:spPr>
+          <a:xfrm>
+            <a:off x="4315968" y="1828800"/>
+            <a:ext cx="3474720" cy="3154680"/>
           </a:xfrm>
           <a:prstGeom prst="roundRect">
             <a:avLst>
-              <a:gd name="adj" fmla="val 15556"/>
+              <a:gd name="adj" fmla="val 4058"/>
             </a:avLst>
           </a:prstGeom>
           <a:solidFill>
@@ -5080,92 +4978,68 @@
           </a:ln>
         </p:spPr>
       </p:sp>
-      <p:sp>
-        <p:nvSpPr>
-          <p:cNvPr id="13" name="Text 11"/>
-          <p:cNvSpPr/>
-          <p:nvPr/>
-        </p:nvSpPr>
-        <p:spPr>
-          <a:xfrm>
-            <a:off x="8366760" y="2148840"/>
-            <a:ext cx="731520" cy="182880"/>
-          </a:xfrm>
-          <a:prstGeom prst="rect">
-            <a:avLst/>
-          </a:prstGeom>
-          <a:noFill/>
-          <a:ln/>
-        </p:spPr>
-        <p:txBody>
-          <a:bodyPr wrap="square" lIns="0" tIns="0" rIns="0" bIns="0" rtlCol="0" anchor="ctr"/>
-          <a:lstStyle/>
-          <a:p>
-            <a:pPr indent="0" marL="0">
-              <a:buNone/>
-            </a:pPr>
-            <a:r>
-              <a:rPr lang="en-US" sz="1000" b="1" dirty="0">
-                <a:solidFill>
-                  <a:srgbClr val="295B3B"/>
-                </a:solidFill>
-              </a:rPr>
-              <a:t>P(T)</a:t>
-            </a:r>
-            <a:endParaRPr lang="en-US" sz="1000" dirty="0"/>
-          </a:p>
-        </p:txBody>
-      </p:sp>
-      <p:sp>
-        <p:nvSpPr>
-          <p:cNvPr id="14" name="Text 12"/>
-          <p:cNvSpPr/>
-          <p:nvPr/>
-        </p:nvSpPr>
-        <p:spPr>
-          <a:xfrm>
-            <a:off x="9326880" y="2075688"/>
-            <a:ext cx="822960" cy="320040"/>
-          </a:xfrm>
-          <a:prstGeom prst="rect">
-            <a:avLst/>
-          </a:prstGeom>
-          <a:noFill/>
-          <a:ln/>
-        </p:spPr>
-        <p:txBody>
-          <a:bodyPr wrap="square" lIns="0" tIns="0" rIns="0" bIns="0" rtlCol="0" anchor="ctr"/>
-          <a:lstStyle/>
-          <a:p>
-            <a:pPr algn="r" indent="0" marL="0">
-              <a:buNone/>
-            </a:pPr>
-            <a:r>
-              <a:rPr lang="en-US" sz="2200" b="1" dirty="0">
-                <a:solidFill>
-                  <a:srgbClr val="17221B"/>
-                </a:solidFill>
-              </a:rPr>
-              <a:t>0.12</a:t>
-            </a:r>
-            <a:endParaRPr lang="en-US" sz="2200" dirty="0"/>
-          </a:p>
-        </p:txBody>
-      </p:sp>
-      <p:sp>
-        <p:nvSpPr>
-          <p:cNvPr id="15" name="Shape 13"/>
-          <p:cNvSpPr/>
-          <p:nvPr/>
-        </p:nvSpPr>
-        <p:spPr>
-          <a:xfrm>
-            <a:off x="5623560" y="3063240"/>
-            <a:ext cx="2240280" cy="822960"/>
+      <p:pic>
+        <p:nvPicPr>
+          <p:cNvPr id="7" name="Image 0" descr="/Users/boonkerdinchoi/Documents/PyCoach/slides/assets/mastery-passed.png">    </p:cNvPr>
+          <p:cNvPicPr>
+            <a:picLocks noChangeAspect="1"/>
+          </p:cNvPicPr>
+          <p:nvPr/>
+        </p:nvPicPr>
+        <p:blipFill>
+          <a:blip r:embed="rId1"/>
+          <a:stretch>
+            <a:fillRect/>
+          </a:stretch>
+        </p:blipFill>
+        <p:spPr>
+          <a:xfrm>
+            <a:off x="777240" y="1947672"/>
+            <a:ext cx="3163824" cy="2752344"/>
+          </a:xfrm>
+          <a:prstGeom prst="rect">
+            <a:avLst/>
+          </a:prstGeom>
+        </p:spPr>
+      </p:pic>
+      <p:pic>
+        <p:nvPicPr>
+          <p:cNvPr id="8" name="Image 1" descr="/Users/boonkerdinchoi/Documents/PyCoach/slides/assets/mastery-failed.png">    </p:cNvPr>
+          <p:cNvPicPr>
+            <a:picLocks noChangeAspect="1"/>
+          </p:cNvPicPr>
+          <p:nvPr/>
+        </p:nvPicPr>
+        <p:blipFill>
+          <a:blip r:embed="rId2"/>
+          <a:stretch>
+            <a:fillRect/>
+          </a:stretch>
+        </p:blipFill>
+        <p:spPr>
+          <a:xfrm>
+            <a:off x="4471416" y="1947672"/>
+            <a:ext cx="3163824" cy="2752344"/>
+          </a:xfrm>
+          <a:prstGeom prst="rect">
+            <a:avLst/>
+          </a:prstGeom>
+        </p:spPr>
+      </p:pic>
+      <p:sp>
+        <p:nvSpPr>
+          <p:cNvPr id="9" name="Shape 5"/>
+          <p:cNvSpPr/>
+          <p:nvPr/>
+        </p:nvSpPr>
+        <p:spPr>
+          <a:xfrm>
+            <a:off x="8001000" y="1993392"/>
+            <a:ext cx="1481328" cy="768096"/>
           </a:xfrm>
           <a:prstGeom prst="roundRect">
             <a:avLst>
-              <a:gd name="adj" fmla="val 15556"/>
+              <a:gd name="adj" fmla="val 16667"/>
             </a:avLst>
           </a:prstGeom>
           <a:solidFill>
@@ -5181,14 +5055,14 @@
       </p:sp>
       <p:sp>
         <p:nvSpPr>
-          <p:cNvPr id="16" name="Text 14"/>
-          <p:cNvSpPr/>
-          <p:nvPr/>
-        </p:nvSpPr>
-        <p:spPr>
-          <a:xfrm>
-            <a:off x="5806440" y="3246120"/>
-            <a:ext cx="731520" cy="182880"/>
+          <p:cNvPr id="10" name="Text 6"/>
+          <p:cNvSpPr/>
+          <p:nvPr/>
+        </p:nvSpPr>
+        <p:spPr>
+          <a:xfrm>
+            <a:off x="8147304" y="2185416"/>
+            <a:ext cx="621792" cy="164592"/>
           </a:xfrm>
           <a:prstGeom prst="rect">
             <a:avLst/>
@@ -5204,27 +5078,27 @@
               <a:buNone/>
             </a:pPr>
             <a:r>
-              <a:rPr lang="en-US" sz="1000" b="1" dirty="0">
+              <a:rPr lang="en-US" sz="900" b="1" dirty="0">
                 <a:solidFill>
                   <a:srgbClr val="295B3B"/>
                 </a:solidFill>
               </a:rPr>
-              <a:t>P(G)</a:t>
-            </a:r>
-            <a:endParaRPr lang="en-US" sz="1000" dirty="0"/>
-          </a:p>
-        </p:txBody>
-      </p:sp>
-      <p:sp>
-        <p:nvSpPr>
-          <p:cNvPr id="17" name="Text 15"/>
-          <p:cNvSpPr/>
-          <p:nvPr/>
-        </p:nvSpPr>
-        <p:spPr>
-          <a:xfrm>
-            <a:off x="6766560" y="3172968"/>
-            <a:ext cx="822960" cy="320040"/>
+              <a:t>P(L₀)</a:t>
+            </a:r>
+            <a:endParaRPr lang="en-US" sz="900" dirty="0"/>
+          </a:p>
+        </p:txBody>
+      </p:sp>
+      <p:sp>
+        <p:nvSpPr>
+          <p:cNvPr id="11" name="Text 7"/>
+          <p:cNvSpPr/>
+          <p:nvPr/>
+        </p:nvSpPr>
+        <p:spPr>
+          <a:xfrm>
+            <a:off x="8823960" y="2084832"/>
+            <a:ext cx="420624" cy="256032"/>
           </a:xfrm>
           <a:prstGeom prst="rect">
             <a:avLst/>
@@ -5240,31 +5114,31 @@
               <a:buNone/>
             </a:pPr>
             <a:r>
-              <a:rPr lang="en-US" sz="2200" b="1" dirty="0">
+              <a:rPr lang="en-US" sz="1600" b="1" dirty="0">
                 <a:solidFill>
                   <a:srgbClr val="17221B"/>
                 </a:solidFill>
               </a:rPr>
-              <a:t>0.20</a:t>
-            </a:r>
-            <a:endParaRPr lang="en-US" sz="2200" dirty="0"/>
-          </a:p>
-        </p:txBody>
-      </p:sp>
-      <p:sp>
-        <p:nvSpPr>
-          <p:cNvPr id="18" name="Shape 16"/>
-          <p:cNvSpPr/>
-          <p:nvPr/>
-        </p:nvSpPr>
-        <p:spPr>
-          <a:xfrm>
-            <a:off x="8183880" y="3063240"/>
-            <a:ext cx="2240280" cy="822960"/>
+              <a:t>0.30</a:t>
+            </a:r>
+            <a:endParaRPr lang="en-US" sz="1600" dirty="0"/>
+          </a:p>
+        </p:txBody>
+      </p:sp>
+      <p:sp>
+        <p:nvSpPr>
+          <p:cNvPr id="12" name="Shape 8"/>
+          <p:cNvSpPr/>
+          <p:nvPr/>
+        </p:nvSpPr>
+        <p:spPr>
+          <a:xfrm>
+            <a:off x="9692640" y="1993392"/>
+            <a:ext cx="1481328" cy="768096"/>
           </a:xfrm>
           <a:prstGeom prst="roundRect">
             <a:avLst>
-              <a:gd name="adj" fmla="val 15556"/>
+              <a:gd name="adj" fmla="val 16667"/>
             </a:avLst>
           </a:prstGeom>
           <a:solidFill>
@@ -5280,14 +5154,14 @@
       </p:sp>
       <p:sp>
         <p:nvSpPr>
-          <p:cNvPr id="19" name="Text 17"/>
-          <p:cNvSpPr/>
-          <p:nvPr/>
-        </p:nvSpPr>
-        <p:spPr>
-          <a:xfrm>
-            <a:off x="8366760" y="3246120"/>
-            <a:ext cx="731520" cy="182880"/>
+          <p:cNvPr id="13" name="Text 9"/>
+          <p:cNvSpPr/>
+          <p:nvPr/>
+        </p:nvSpPr>
+        <p:spPr>
+          <a:xfrm>
+            <a:off x="9838944" y="2185416"/>
+            <a:ext cx="621792" cy="164592"/>
           </a:xfrm>
           <a:prstGeom prst="rect">
             <a:avLst/>
@@ -5303,27 +5177,27 @@
               <a:buNone/>
             </a:pPr>
             <a:r>
-              <a:rPr lang="en-US" sz="1000" b="1" dirty="0">
+              <a:rPr lang="en-US" sz="900" b="1" dirty="0">
                 <a:solidFill>
                   <a:srgbClr val="295B3B"/>
                 </a:solidFill>
               </a:rPr>
-              <a:t>P(S)</a:t>
-            </a:r>
-            <a:endParaRPr lang="en-US" sz="1000" dirty="0"/>
-          </a:p>
-        </p:txBody>
-      </p:sp>
-      <p:sp>
-        <p:nvSpPr>
-          <p:cNvPr id="20" name="Text 18"/>
-          <p:cNvSpPr/>
-          <p:nvPr/>
-        </p:nvSpPr>
-        <p:spPr>
-          <a:xfrm>
-            <a:off x="9326880" y="3172968"/>
-            <a:ext cx="822960" cy="320040"/>
+              <a:t>P(T)</a:t>
+            </a:r>
+            <a:endParaRPr lang="en-US" sz="900" dirty="0"/>
+          </a:p>
+        </p:txBody>
+      </p:sp>
+      <p:sp>
+        <p:nvSpPr>
+          <p:cNvPr id="14" name="Text 10"/>
+          <p:cNvSpPr/>
+          <p:nvPr/>
+        </p:nvSpPr>
+        <p:spPr>
+          <a:xfrm>
+            <a:off x="10515600" y="2084832"/>
+            <a:ext cx="420624" cy="256032"/>
           </a:xfrm>
           <a:prstGeom prst="rect">
             <a:avLst/>
@@ -5339,35 +5213,35 @@
               <a:buNone/>
             </a:pPr>
             <a:r>
-              <a:rPr lang="en-US" sz="2200" b="1" dirty="0">
+              <a:rPr lang="en-US" sz="1600" b="1" dirty="0">
                 <a:solidFill>
                   <a:srgbClr val="17221B"/>
                 </a:solidFill>
               </a:rPr>
-              <a:t>0.10</a:t>
-            </a:r>
-            <a:endParaRPr lang="en-US" sz="2200" dirty="0"/>
-          </a:p>
-        </p:txBody>
-      </p:sp>
-      <p:sp>
-        <p:nvSpPr>
-          <p:cNvPr id="21" name="Shape 19"/>
-          <p:cNvSpPr/>
-          <p:nvPr/>
-        </p:nvSpPr>
-        <p:spPr>
-          <a:xfrm>
-            <a:off x="5623560" y="4315968"/>
-            <a:ext cx="4800600" cy="987552"/>
+              <a:t>0.12</a:t>
+            </a:r>
+            <a:endParaRPr lang="en-US" sz="1600" dirty="0"/>
+          </a:p>
+        </p:txBody>
+      </p:sp>
+      <p:sp>
+        <p:nvSpPr>
+          <p:cNvPr id="15" name="Shape 11"/>
+          <p:cNvSpPr/>
+          <p:nvPr/>
+        </p:nvSpPr>
+        <p:spPr>
+          <a:xfrm>
+            <a:off x="8001000" y="2953512"/>
+            <a:ext cx="1481328" cy="768096"/>
           </a:xfrm>
           <a:prstGeom prst="roundRect">
             <a:avLst>
-              <a:gd name="adj" fmla="val 11111"/>
+              <a:gd name="adj" fmla="val 16667"/>
             </a:avLst>
           </a:prstGeom>
           <a:solidFill>
-            <a:srgbClr val="EAF0E5"/>
+            <a:srgbClr val="FFFFFF"/>
           </a:solidFill>
           <a:ln w="12700">
             <a:solidFill>
@@ -5379,14 +5253,14 @@
       </p:sp>
       <p:sp>
         <p:nvSpPr>
-          <p:cNvPr id="22" name="Text 20"/>
-          <p:cNvSpPr/>
-          <p:nvPr/>
-        </p:nvSpPr>
-        <p:spPr>
-          <a:xfrm>
-            <a:off x="5897880" y="4544568"/>
-            <a:ext cx="1920240" cy="146304"/>
+          <p:cNvPr id="16" name="Text 12"/>
+          <p:cNvSpPr/>
+          <p:nvPr/>
+        </p:nvSpPr>
+        <p:spPr>
+          <a:xfrm>
+            <a:off x="8147304" y="3145536"/>
+            <a:ext cx="621792" cy="164592"/>
           </a:xfrm>
           <a:prstGeom prst="rect">
             <a:avLst/>
@@ -5402,50 +5276,392 @@
               <a:buNone/>
             </a:pPr>
             <a:r>
-              <a:rPr lang="en-US" sz="750" b="1" spc="120" kern="0" dirty="0">
+              <a:rPr lang="en-US" sz="900" b="1" dirty="0">
+                <a:solidFill>
+                  <a:srgbClr val="295B3B"/>
+                </a:solidFill>
+              </a:rPr>
+              <a:t>P(G)</a:t>
+            </a:r>
+            <a:endParaRPr lang="en-US" sz="900" dirty="0"/>
+          </a:p>
+        </p:txBody>
+      </p:sp>
+      <p:sp>
+        <p:nvSpPr>
+          <p:cNvPr id="17" name="Text 13"/>
+          <p:cNvSpPr/>
+          <p:nvPr/>
+        </p:nvSpPr>
+        <p:spPr>
+          <a:xfrm>
+            <a:off x="8823960" y="3044952"/>
+            <a:ext cx="420624" cy="256032"/>
+          </a:xfrm>
+          <a:prstGeom prst="rect">
+            <a:avLst/>
+          </a:prstGeom>
+          <a:noFill/>
+          <a:ln/>
+        </p:spPr>
+        <p:txBody>
+          <a:bodyPr wrap="square" lIns="0" tIns="0" rIns="0" bIns="0" rtlCol="0" anchor="ctr"/>
+          <a:lstStyle/>
+          <a:p>
+            <a:pPr algn="r" indent="0" marL="0">
+              <a:buNone/>
+            </a:pPr>
+            <a:r>
+              <a:rPr lang="en-US" sz="1600" b="1" dirty="0">
+                <a:solidFill>
+                  <a:srgbClr val="17221B"/>
+                </a:solidFill>
+              </a:rPr>
+              <a:t>0.20</a:t>
+            </a:r>
+            <a:endParaRPr lang="en-US" sz="1600" dirty="0"/>
+          </a:p>
+        </p:txBody>
+      </p:sp>
+      <p:sp>
+        <p:nvSpPr>
+          <p:cNvPr id="18" name="Shape 14"/>
+          <p:cNvSpPr/>
+          <p:nvPr/>
+        </p:nvSpPr>
+        <p:spPr>
+          <a:xfrm>
+            <a:off x="9692640" y="2953512"/>
+            <a:ext cx="1481328" cy="768096"/>
+          </a:xfrm>
+          <a:prstGeom prst="roundRect">
+            <a:avLst>
+              <a:gd name="adj" fmla="val 16667"/>
+            </a:avLst>
+          </a:prstGeom>
+          <a:solidFill>
+            <a:srgbClr val="FFFFFF"/>
+          </a:solidFill>
+          <a:ln w="12700">
+            <a:solidFill>
+              <a:srgbClr val="DCE5D8"/>
+            </a:solidFill>
+            <a:prstDash val="solid"/>
+          </a:ln>
+        </p:spPr>
+      </p:sp>
+      <p:sp>
+        <p:nvSpPr>
+          <p:cNvPr id="19" name="Text 15"/>
+          <p:cNvSpPr/>
+          <p:nvPr/>
+        </p:nvSpPr>
+        <p:spPr>
+          <a:xfrm>
+            <a:off x="9838944" y="3145536"/>
+            <a:ext cx="621792" cy="164592"/>
+          </a:xfrm>
+          <a:prstGeom prst="rect">
+            <a:avLst/>
+          </a:prstGeom>
+          <a:noFill/>
+          <a:ln/>
+        </p:spPr>
+        <p:txBody>
+          <a:bodyPr wrap="square" lIns="0" tIns="0" rIns="0" bIns="0" rtlCol="0" anchor="ctr"/>
+          <a:lstStyle/>
+          <a:p>
+            <a:pPr indent="0" marL="0">
+              <a:buNone/>
+            </a:pPr>
+            <a:r>
+              <a:rPr lang="en-US" sz="900" b="1" dirty="0">
+                <a:solidFill>
+                  <a:srgbClr val="295B3B"/>
+                </a:solidFill>
+              </a:rPr>
+              <a:t>P(S)</a:t>
+            </a:r>
+            <a:endParaRPr lang="en-US" sz="900" dirty="0"/>
+          </a:p>
+        </p:txBody>
+      </p:sp>
+      <p:sp>
+        <p:nvSpPr>
+          <p:cNvPr id="20" name="Text 16"/>
+          <p:cNvSpPr/>
+          <p:nvPr/>
+        </p:nvSpPr>
+        <p:spPr>
+          <a:xfrm>
+            <a:off x="10515600" y="3044952"/>
+            <a:ext cx="420624" cy="256032"/>
+          </a:xfrm>
+          <a:prstGeom prst="rect">
+            <a:avLst/>
+          </a:prstGeom>
+          <a:noFill/>
+          <a:ln/>
+        </p:spPr>
+        <p:txBody>
+          <a:bodyPr wrap="square" lIns="0" tIns="0" rIns="0" bIns="0" rtlCol="0" anchor="ctr"/>
+          <a:lstStyle/>
+          <a:p>
+            <a:pPr algn="r" indent="0" marL="0">
+              <a:buNone/>
+            </a:pPr>
+            <a:r>
+              <a:rPr lang="en-US" sz="1600" b="1" dirty="0">
+                <a:solidFill>
+                  <a:srgbClr val="17221B"/>
+                </a:solidFill>
+              </a:rPr>
+              <a:t>0.10</a:t>
+            </a:r>
+            <a:endParaRPr lang="en-US" sz="1600" dirty="0"/>
+          </a:p>
+        </p:txBody>
+      </p:sp>
+      <p:sp>
+        <p:nvSpPr>
+          <p:cNvPr id="21" name="Shape 17"/>
+          <p:cNvSpPr/>
+          <p:nvPr/>
+        </p:nvSpPr>
+        <p:spPr>
+          <a:xfrm>
+            <a:off x="7818120" y="3858768"/>
+            <a:ext cx="4160520" cy="1965960"/>
+          </a:xfrm>
+          <a:prstGeom prst="roundRect">
+            <a:avLst>
+              <a:gd name="adj" fmla="val 6512"/>
+            </a:avLst>
+          </a:prstGeom>
+          <a:solidFill>
+            <a:srgbClr val="FFFFFF"/>
+          </a:solidFill>
+          <a:ln w="12700">
+            <a:solidFill>
+              <a:srgbClr val="DCE5D8"/>
+            </a:solidFill>
+            <a:prstDash val="solid"/>
+          </a:ln>
+        </p:spPr>
+      </p:sp>
+      <p:sp>
+        <p:nvSpPr>
+          <p:cNvPr id="22" name="Text 18"/>
+          <p:cNvSpPr/>
+          <p:nvPr/>
+        </p:nvSpPr>
+        <p:spPr>
+          <a:xfrm>
+            <a:off x="8065008" y="4133088"/>
+            <a:ext cx="2194560" cy="164592"/>
+          </a:xfrm>
+          <a:prstGeom prst="rect">
+            <a:avLst/>
+          </a:prstGeom>
+          <a:noFill/>
+          <a:ln/>
+        </p:spPr>
+        <p:txBody>
+          <a:bodyPr wrap="square" lIns="0" tIns="0" rIns="0" bIns="0" rtlCol="0" anchor="ctr"/>
+          <a:lstStyle/>
+          <a:p>
+            <a:pPr indent="0" marL="0">
+              <a:buNone/>
+            </a:pPr>
+            <a:r>
+              <a:rPr lang="en-US" sz="800" b="1" spc="120" kern="0" dirty="0">
                 <a:solidFill>
                   <a:srgbClr val="EF6A47"/>
                 </a:solidFill>
               </a:rPr>
-              <a:t>RECOMMENDATION RULE</a:t>
-            </a:r>
-            <a:endParaRPr lang="en-US" sz="750" dirty="0"/>
-          </a:p>
-        </p:txBody>
-      </p:sp>
-      <p:sp>
-        <p:nvSpPr>
-          <p:cNvPr id="23" name="Text 21"/>
-          <p:cNvSpPr/>
-          <p:nvPr/>
-        </p:nvSpPr>
-        <p:spPr>
-          <a:xfrm>
-            <a:off x="5897880" y="4828032"/>
-            <a:ext cx="4114800" cy="201168"/>
-          </a:xfrm>
-          <a:prstGeom prst="rect">
-            <a:avLst/>
-          </a:prstGeom>
-          <a:noFill/>
-          <a:ln/>
-        </p:spPr>
-        <p:txBody>
-          <a:bodyPr wrap="square" lIns="0" tIns="0" rIns="0" bIns="0" rtlCol="0" anchor="ctr"/>
-          <a:lstStyle/>
-          <a:p>
-            <a:pPr indent="0" marL="0">
-              <a:buNone/>
-            </a:pPr>
-            <a:r>
-              <a:rPr lang="en-US" sz="1200" b="1" dirty="0">
-                <a:solidFill>
-                  <a:srgbClr val="17221B"/>
-                </a:solidFill>
-              </a:rPr>
-              <a:t>Serve an unfinished assignment for the lowest-mastery skill.</a:t>
-            </a:r>
-            <a:endParaRPr lang="en-US" sz="1200" dirty="0"/>
+              <a:t>Recommendation behavior</a:t>
+            </a:r>
+            <a:endParaRPr lang="en-US" sz="800" dirty="0"/>
+          </a:p>
+        </p:txBody>
+      </p:sp>
+      <p:sp>
+        <p:nvSpPr>
+          <p:cNvPr id="23" name="Text 19"/>
+          <p:cNvSpPr/>
+          <p:nvPr/>
+        </p:nvSpPr>
+        <p:spPr>
+          <a:xfrm>
+            <a:off x="8065008" y="4462272"/>
+            <a:ext cx="3566160" cy="310896"/>
+          </a:xfrm>
+          <a:prstGeom prst="rect">
+            <a:avLst/>
+          </a:prstGeom>
+          <a:noFill/>
+          <a:ln/>
+        </p:spPr>
+        <p:txBody>
+          <a:bodyPr wrap="square" lIns="0" tIns="0" rIns="0" bIns="0" rtlCol="0" anchor="ctr">
+            <a:normAutofit/>
+          </a:bodyPr>
+          <a:lstStyle/>
+          <a:p>
+            <a:pPr indent="0" marL="0">
+              <a:buNone/>
+            </a:pPr>
+            <a:r>
+              <a:rPr lang="en-US" sz="850" dirty="0">
+                <a:solidFill>
+                  <a:srgbClr val="607067"/>
+                </a:solidFill>
+              </a:rPr>
+              <a:t>• Brand new student: start with Variables</a:t>
+            </a:r>
+            <a:endParaRPr lang="en-US" sz="850" dirty="0"/>
+          </a:p>
+        </p:txBody>
+      </p:sp>
+      <p:sp>
+        <p:nvSpPr>
+          <p:cNvPr id="24" name="Text 20"/>
+          <p:cNvSpPr/>
+          <p:nvPr/>
+        </p:nvSpPr>
+        <p:spPr>
+          <a:xfrm>
+            <a:off x="8065008" y="4782312"/>
+            <a:ext cx="3566160" cy="310896"/>
+          </a:xfrm>
+          <a:prstGeom prst="rect">
+            <a:avLst/>
+          </a:prstGeom>
+          <a:noFill/>
+          <a:ln/>
+        </p:spPr>
+        <p:txBody>
+          <a:bodyPr wrap="square" lIns="0" tIns="0" rIns="0" bIns="0" rtlCol="0" anchor="ctr">
+            <a:normAutofit/>
+          </a:bodyPr>
+          <a:lstStyle/>
+          <a:p>
+            <a:pPr indent="0" marL="0">
+              <a:buNone/>
+            </a:pPr>
+            <a:r>
+              <a:rPr lang="en-US" sz="850" dirty="0">
+                <a:solidFill>
+                  <a:srgbClr val="607067"/>
+                </a:solidFill>
+              </a:rPr>
+              <a:t>• Partially attempted path: recommend the next</a:t>
+            </a:r>
+            <a:endParaRPr lang="en-US" sz="850" dirty="0"/>
+          </a:p>
+          <a:p>
+            <a:pPr indent="0" marL="0">
+              <a:buNone/>
+            </a:pPr>
+            <a:r>
+              <a:rPr lang="en-US" sz="850" dirty="0">
+                <a:solidFill>
+                  <a:srgbClr val="607067"/>
+                </a:solidFill>
+              </a:rPr>
+              <a:t>unattempted concept</a:t>
+            </a:r>
+            <a:endParaRPr lang="en-US" sz="850" dirty="0"/>
+          </a:p>
+        </p:txBody>
+      </p:sp>
+      <p:sp>
+        <p:nvSpPr>
+          <p:cNvPr id="25" name="Text 21"/>
+          <p:cNvSpPr/>
+          <p:nvPr/>
+        </p:nvSpPr>
+        <p:spPr>
+          <a:xfrm>
+            <a:off x="8065008" y="5102352"/>
+            <a:ext cx="3566160" cy="310896"/>
+          </a:xfrm>
+          <a:prstGeom prst="rect">
+            <a:avLst/>
+          </a:prstGeom>
+          <a:noFill/>
+          <a:ln/>
+        </p:spPr>
+        <p:txBody>
+          <a:bodyPr wrap="square" lIns="0" tIns="0" rIns="0" bIns="0" rtlCol="0" anchor="ctr">
+            <a:normAutofit/>
+          </a:bodyPr>
+          <a:lstStyle/>
+          <a:p>
+            <a:pPr indent="0" marL="0">
+              <a:buNone/>
+            </a:pPr>
+            <a:r>
+              <a:rPr lang="en-US" sz="850" dirty="0">
+                <a:solidFill>
+                  <a:srgbClr val="607067"/>
+                </a:solidFill>
+              </a:rPr>
+              <a:t>• All skills attempted: recommend the weakest mastery</a:t>
+            </a:r>
+            <a:endParaRPr lang="en-US" sz="850" dirty="0"/>
+          </a:p>
+        </p:txBody>
+      </p:sp>
+      <p:sp>
+        <p:nvSpPr>
+          <p:cNvPr id="26" name="Text 22"/>
+          <p:cNvSpPr/>
+          <p:nvPr/>
+        </p:nvSpPr>
+        <p:spPr>
+          <a:xfrm>
+            <a:off x="8065008" y="5422392"/>
+            <a:ext cx="3566160" cy="310896"/>
+          </a:xfrm>
+          <a:prstGeom prst="rect">
+            <a:avLst/>
+          </a:prstGeom>
+          <a:noFill/>
+          <a:ln/>
+        </p:spPr>
+        <p:txBody>
+          <a:bodyPr wrap="square" lIns="0" tIns="0" rIns="0" bIns="0" rtlCol="0" anchor="ctr">
+            <a:normAutofit/>
+          </a:bodyPr>
+          <a:lstStyle/>
+          <a:p>
+            <a:pPr indent="0" marL="0">
+              <a:buNone/>
+            </a:pPr>
+            <a:r>
+              <a:rPr lang="en-US" sz="850" dirty="0">
+                <a:solidFill>
+                  <a:srgbClr val="607067"/>
+                </a:solidFill>
+              </a:rPr>
+              <a:t>• Score below 80 after grading: retry the same</a:t>
+            </a:r>
+            <a:endParaRPr lang="en-US" sz="850" dirty="0"/>
+          </a:p>
+          <a:p>
+            <a:pPr indent="0" marL="0">
+              <a:buNone/>
+            </a:pPr>
+            <a:r>
+              <a:rPr lang="en-US" sz="850" dirty="0">
+                <a:solidFill>
+                  <a:srgbClr val="607067"/>
+                </a:solidFill>
+              </a:rPr>
+              <a:t>assignment first</a:t>
+            </a:r>
+            <a:endParaRPr lang="en-US" sz="850" dirty="0"/>
           </a:p>
         </p:txBody>
       </p:sp>
@@ -5531,7 +5747,7 @@
         <p:spPr>
           <a:xfrm>
             <a:off x="594360" y="438912"/>
-            <a:ext cx="4114800" cy="182880"/>
+            <a:ext cx="4389120" cy="182880"/>
           </a:xfrm>
           <a:prstGeom prst="rect">
             <a:avLst/>
@@ -5585,14 +5801,14 @@
               <a:buNone/>
             </a:pPr>
             <a:r>
-              <a:rPr lang="en-US" sz="3100" b="1" dirty="0">
+              <a:rPr lang="en-US" sz="3000" b="1" dirty="0">
                 <a:solidFill>
                   <a:srgbClr val="17221B"/>
                 </a:solidFill>
               </a:rPr>
-              <a:t>A tested MVP with honest edges</a:t>
-            </a:r>
-            <a:endParaRPr lang="en-US" sz="3100" dirty="0"/>
+              <a:t>What is real today, and what comes next</a:t>
+            </a:r>
+            <a:endParaRPr lang="en-US" sz="3000" dirty="0"/>
           </a:p>
         </p:txBody>
       </p:sp>
@@ -5605,7 +5821,7 @@
         <p:spPr>
           <a:xfrm>
             <a:off x="612648" y="1389888"/>
-            <a:ext cx="9875520" cy="347472"/>
+            <a:ext cx="10241280" cy="347472"/>
           </a:xfrm>
           <a:prstGeom prst="rect">
             <a:avLst/>
@@ -5628,7 +5844,7 @@
                   <a:srgbClr val="607067"/>
                 </a:solidFill>
               </a:rPr>
-              <a:t>The implementation is ready for Supabase credentials, an isolated runner, and Vercel deployment.</a:t>
+              <a:t>The app is deployed, tested through build, and documented with clear next steps for production hardening.</a:t>
             </a:r>
             <a:endParaRPr lang="en-US" sz="1200" dirty="0"/>
           </a:p>
@@ -5686,14 +5902,14 @@
               <a:buNone/>
             </a:pPr>
             <a:r>
-              <a:rPr lang="en-US" sz="2700" b="1" dirty="0">
+              <a:rPr lang="en-US" sz="2400" b="1" dirty="0">
                 <a:solidFill>
                   <a:srgbClr val="295B3B"/>
                 </a:solidFill>
               </a:rPr>
-              <a:t>5 / 5</a:t>
-            </a:r>
-            <a:endParaRPr lang="en-US" sz="2700" dirty="0"/>
+              <a:t>LIVE</a:t>
+            </a:r>
+            <a:endParaRPr lang="en-US" sz="2400" dirty="0"/>
           </a:p>
         </p:txBody>
       </p:sp>
@@ -5727,7 +5943,7 @@
                   <a:srgbClr val="607067"/>
                 </a:solidFill>
               </a:rPr>
-              <a:t>UNIT TESTS</a:t>
+              <a:t>VERCEL APP</a:t>
             </a:r>
             <a:endParaRPr lang="en-US" sz="750" dirty="0"/>
           </a:p>
@@ -5785,14 +6001,14 @@
               <a:buNone/>
             </a:pPr>
             <a:r>
-              <a:rPr lang="en-US" sz="2700" b="1" dirty="0">
-                <a:solidFill>
-                  <a:srgbClr val="295B3B"/>
-                </a:solidFill>
-              </a:rPr>
-              <a:t>17</a:t>
-            </a:r>
-            <a:endParaRPr lang="en-US" sz="2700" dirty="0"/>
+              <a:rPr lang="en-US" sz="2400" b="1" dirty="0">
+                <a:solidFill>
+                  <a:srgbClr val="EF6A47"/>
+                </a:solidFill>
+              </a:rPr>
+              <a:t>AUTH</a:t>
+            </a:r>
+            <a:endParaRPr lang="en-US" sz="2400" dirty="0"/>
           </a:p>
         </p:txBody>
       </p:sp>
@@ -5826,7 +6042,7 @@
                   <a:srgbClr val="607067"/>
                 </a:solidFill>
               </a:rPr>
-              <a:t>ROUTES + PAGES BUILT</a:t>
+              <a:t>LOGIN + SIGNUP</a:t>
             </a:r>
             <a:endParaRPr lang="en-US" sz="750" dirty="0"/>
           </a:p>
@@ -5884,14 +6100,14 @@
               <a:buNone/>
             </a:pPr>
             <a:r>
-              <a:rPr lang="en-US" sz="2700" b="1" dirty="0">
-                <a:solidFill>
-                  <a:srgbClr val="EF6A47"/>
-                </a:solidFill>
-              </a:rPr>
-              <a:t>0</a:t>
-            </a:r>
-            <a:endParaRPr lang="en-US" sz="2700" dirty="0"/>
+              <a:rPr lang="en-US" sz="2400" b="1" dirty="0">
+                <a:solidFill>
+                  <a:srgbClr val="295B3B"/>
+                </a:solidFill>
+              </a:rPr>
+              <a:t>GRADE</a:t>
+            </a:r>
+            <a:endParaRPr lang="en-US" sz="2400" dirty="0"/>
           </a:p>
         </p:txBody>
       </p:sp>
@@ -5925,7 +6141,7 @@
                   <a:srgbClr val="607067"/>
                 </a:solidFill>
               </a:rPr>
-              <a:t>BROWSER CONSOLE ERRORS</a:t>
+              <a:t>GROQ + RUBRIC</a:t>
             </a:r>
             <a:endParaRPr lang="en-US" sz="750" dirty="0"/>
           </a:p>
@@ -5983,14 +6199,14 @@
               <a:buNone/>
             </a:pPr>
             <a:r>
-              <a:rPr lang="en-US" sz="2700" b="1" dirty="0">
-                <a:solidFill>
-                  <a:srgbClr val="295B3B"/>
-                </a:solidFill>
-              </a:rPr>
-              <a:t>390 px</a:t>
-            </a:r>
-            <a:endParaRPr lang="en-US" sz="2700" dirty="0"/>
+              <a:rPr lang="en-US" sz="2400" b="1" dirty="0">
+                <a:solidFill>
+                  <a:srgbClr val="EF6A47"/>
+                </a:solidFill>
+              </a:rPr>
+              <a:t>OVERVIEW</a:t>
+            </a:r>
+            <a:endParaRPr lang="en-US" sz="2400" dirty="0"/>
           </a:p>
         </p:txBody>
       </p:sp>
@@ -6024,7 +6240,7 @@
                   <a:srgbClr val="607067"/>
                 </a:solidFill>
               </a:rPr>
-              <a:t>MOBILE QA PASSED</a:t>
+              <a:t>INSTRUCTOR DRILL-DOWN</a:t>
             </a:r>
             <a:endParaRPr lang="en-US" sz="750" dirty="0"/>
           </a:p>
@@ -6075,7 +6291,7 @@
         <p:spPr>
           <a:xfrm>
             <a:off x="658368" y="4160520"/>
-            <a:ext cx="5760720" cy="960120"/>
+            <a:ext cx="5897880" cy="960120"/>
           </a:xfrm>
           <a:prstGeom prst="rect">
             <a:avLst/>
@@ -6098,7 +6314,7 @@
                   <a:srgbClr val="607067"/>
                 </a:solidFill>
               </a:rPr>
-              <a:t>Corbett &amp; Anderson (1995)  ·  Classical Knowledge Tracing</a:t>
+              <a:t>Corbett &amp; Anderson (1995)  ·  Open PDF via ACT-R archive</a:t>
             </a:r>
             <a:endParaRPr lang="en-US" sz="1200" dirty="0"/>
           </a:p>
@@ -6112,7 +6328,7 @@
                   <a:srgbClr val="607067"/>
                 </a:solidFill>
               </a:rPr>
-              <a:t>Pardos &amp; Heffernan (2010)  ·  Individualized BKT</a:t>
+              <a:t>Pardos &amp; Heffernan (2010)  ·  Open PDF via WPI archive</a:t>
             </a:r>
             <a:endParaRPr lang="en-US" sz="1200" dirty="0"/>
           </a:p>
@@ -6126,7 +6342,7 @@
                   <a:srgbClr val="607067"/>
                 </a:solidFill>
               </a:rPr>
-              <a:t>Piech et al. (2015)  ·  Deep Knowledge Tracing</a:t>
+              <a:t>Piech et al. (2015)  ·  Deep Knowledge Tracing (arXiv:1506.05908)</a:t>
             </a:r>
             <a:endParaRPr lang="en-US" sz="1200" dirty="0"/>
           </a:p>
@@ -6204,7 +6420,7 @@
         <p:spPr>
           <a:xfrm>
             <a:off x="7296912" y="4279392"/>
-            <a:ext cx="3520440" cy="438912"/>
+            <a:ext cx="3566160" cy="475488"/>
           </a:xfrm>
           <a:prstGeom prst="rect">
             <a:avLst/>
@@ -6222,14 +6438,14 @@
               <a:buNone/>
             </a:pPr>
             <a:r>
-              <a:rPr lang="en-US" sz="1700" b="1" dirty="0">
+              <a:rPr lang="en-US" sz="1600" b="1" dirty="0">
                 <a:solidFill>
                   <a:srgbClr val="17221B"/>
                 </a:solidFill>
               </a:rPr>
-              <a:t>Connect credentials → deploy → calibrate from real learning sequences.</a:t>
-            </a:r>
-            <a:endParaRPr lang="en-US" sz="1700" dirty="0"/>
+              <a:t>Add deterministic sandbox execution, per-test feedback, and calibrated BKT from real learner sequences.</a:t>
+            </a:r>
+            <a:endParaRPr lang="en-US" sz="1600" dirty="0"/>
           </a:p>
         </p:txBody>
       </p:sp>
